--- a/Comp/OutPPTX/marp.pptx
+++ b/Comp/OutPPTX/marp.pptx
@@ -1,27 +1,42 @@
 
 <file path=ppt/presentation.xml><?xml version="1.0" encoding="utf-8"?>
-<p:presentation xmlns:a="http://schemas.openxmlformats.org/drawingml/2006/main" xmlns:p="http://schemas.openxmlformats.org/presentationml/2006/main" xmlns:r="http://schemas.openxmlformats.org/officeDocument/2006/relationships" autoCompressPictures="0" saveSubsetFonts="1">
+<p:presentation xmlns:a="http://schemas.openxmlformats.org/drawingml/2006/main" xmlns:r="http://schemas.openxmlformats.org/officeDocument/2006/relationships" xmlns:p="http://schemas.openxmlformats.org/presentationml/2006/main" saveSubsetFonts="1" autoCompressPictures="0">
   <p:sldMasterIdLst>
     <p:sldMasterId id="2147483648" r:id="rId1"/>
   </p:sldMasterIdLst>
   <p:sldIdLst>
-    <p:sldId id="256" r:id="rId2"/>
-    <p:sldId id="257" r:id="rId3"/>
-    <p:sldId id="258" r:id="rId4"/>
-    <p:sldId id="259" r:id="rId5"/>
-    <p:sldId id="260" r:id="rId6"/>
-    <p:sldId id="261" r:id="rId7"/>
-    <p:sldId id="262" r:id="rId8"/>
-    <p:sldId id="263" r:id="rId9"/>
+    <p:sldId id="256" r:id="rId7"/>
+    <p:sldId id="257" r:id="rId8"/>
+    <p:sldId id="258" r:id="rId9"/>
+    <p:sldId id="259" r:id="rId10"/>
+    <p:sldId id="260" r:id="rId11"/>
+    <p:sldId id="261" r:id="rId12"/>
+    <p:sldId id="262" r:id="rId13"/>
+    <p:sldId id="263" r:id="rId14"/>
+    <p:sldId id="264" r:id="rId15"/>
+    <p:sldId id="265" r:id="rId16"/>
+    <p:sldId id="266" r:id="rId17"/>
+    <p:sldId id="267" r:id="rId18"/>
+    <p:sldId id="268" r:id="rId19"/>
+    <p:sldId id="269" r:id="rId20"/>
+    <p:sldId id="270" r:id="rId21"/>
+    <p:sldId id="271" r:id="rId22"/>
+    <p:sldId id="272" r:id="rId23"/>
+    <p:sldId id="273" r:id="rId24"/>
+    <p:sldId id="274" r:id="rId25"/>
+    <p:sldId id="275" r:id="rId26"/>
+    <p:sldId id="276" r:id="rId27"/>
+    <p:sldId id="277" r:id="rId28"/>
+    <p:sldId id="278" r:id="rId29"/>
   </p:sldIdLst>
-  <p:sldSz cx="9144000" cy="5143500" type="screen16x9"/>
+  <p:sldSz cx="9144000" cy="6858000" type="screen4x3"/>
   <p:notesSz cx="6858000" cy="9144000"/>
   <p:defaultTextStyle>
     <a:defPPr>
       <a:defRPr lang="en-US"/>
     </a:defPPr>
-    <a:lvl1pPr algn="l" defTabSz="457200" eaLnBrk="1" hangingPunct="1" latinLnBrk="0" marL="0" rtl="0">
-      <a:defRPr kern="1200" sz="1800">
+    <a:lvl1pPr marL="0" algn="l" defTabSz="457200" rtl="0" eaLnBrk="1" latinLnBrk="0" hangingPunct="1">
+      <a:defRPr sz="1800" kern="1200">
         <a:solidFill>
           <a:schemeClr val="tx1"/>
         </a:solidFill>
@@ -30,8 +45,8 @@
         <a:cs typeface="+mn-cs"/>
       </a:defRPr>
     </a:lvl1pPr>
-    <a:lvl2pPr algn="l" defTabSz="457200" eaLnBrk="1" hangingPunct="1" latinLnBrk="0" marL="457200" rtl="0">
-      <a:defRPr kern="1200" sz="1800">
+    <a:lvl2pPr marL="457200" algn="l" defTabSz="457200" rtl="0" eaLnBrk="1" latinLnBrk="0" hangingPunct="1">
+      <a:defRPr sz="1800" kern="1200">
         <a:solidFill>
           <a:schemeClr val="tx1"/>
         </a:solidFill>
@@ -40,8 +55,8 @@
         <a:cs typeface="+mn-cs"/>
       </a:defRPr>
     </a:lvl2pPr>
-    <a:lvl3pPr algn="l" defTabSz="457200" eaLnBrk="1" hangingPunct="1" latinLnBrk="0" marL="914400" rtl="0">
-      <a:defRPr kern="1200" sz="1800">
+    <a:lvl3pPr marL="914400" algn="l" defTabSz="457200" rtl="0" eaLnBrk="1" latinLnBrk="0" hangingPunct="1">
+      <a:defRPr sz="1800" kern="1200">
         <a:solidFill>
           <a:schemeClr val="tx1"/>
         </a:solidFill>
@@ -50,8 +65,8 @@
         <a:cs typeface="+mn-cs"/>
       </a:defRPr>
     </a:lvl3pPr>
-    <a:lvl4pPr algn="l" defTabSz="457200" eaLnBrk="1" hangingPunct="1" latinLnBrk="0" marL="1371600" rtl="0">
-      <a:defRPr kern="1200" sz="1800">
+    <a:lvl4pPr marL="1371600" algn="l" defTabSz="457200" rtl="0" eaLnBrk="1" latinLnBrk="0" hangingPunct="1">
+      <a:defRPr sz="1800" kern="1200">
         <a:solidFill>
           <a:schemeClr val="tx1"/>
         </a:solidFill>
@@ -60,8 +75,8 @@
         <a:cs typeface="+mn-cs"/>
       </a:defRPr>
     </a:lvl4pPr>
-    <a:lvl5pPr algn="l" defTabSz="457200" eaLnBrk="1" hangingPunct="1" latinLnBrk="0" marL="1828800" rtl="0">
-      <a:defRPr kern="1200" sz="1800">
+    <a:lvl5pPr marL="1828800" algn="l" defTabSz="457200" rtl="0" eaLnBrk="1" latinLnBrk="0" hangingPunct="1">
+      <a:defRPr sz="1800" kern="1200">
         <a:solidFill>
           <a:schemeClr val="tx1"/>
         </a:solidFill>
@@ -70,8 +85,8 @@
         <a:cs typeface="+mn-cs"/>
       </a:defRPr>
     </a:lvl5pPr>
-    <a:lvl6pPr algn="l" defTabSz="457200" eaLnBrk="1" hangingPunct="1" latinLnBrk="0" marL="2286000" rtl="0">
-      <a:defRPr kern="1200" sz="1800">
+    <a:lvl6pPr marL="2286000" algn="l" defTabSz="457200" rtl="0" eaLnBrk="1" latinLnBrk="0" hangingPunct="1">
+      <a:defRPr sz="1800" kern="1200">
         <a:solidFill>
           <a:schemeClr val="tx1"/>
         </a:solidFill>
@@ -80,8 +95,8 @@
         <a:cs typeface="+mn-cs"/>
       </a:defRPr>
     </a:lvl6pPr>
-    <a:lvl7pPr algn="l" defTabSz="457200" eaLnBrk="1" hangingPunct="1" latinLnBrk="0" marL="2743200" rtl="0">
-      <a:defRPr kern="1200" sz="1800">
+    <a:lvl7pPr marL="2743200" algn="l" defTabSz="457200" rtl="0" eaLnBrk="1" latinLnBrk="0" hangingPunct="1">
+      <a:defRPr sz="1800" kern="1200">
         <a:solidFill>
           <a:schemeClr val="tx1"/>
         </a:solidFill>
@@ -90,8 +105,8 @@
         <a:cs typeface="+mn-cs"/>
       </a:defRPr>
     </a:lvl7pPr>
-    <a:lvl8pPr algn="l" defTabSz="457200" eaLnBrk="1" hangingPunct="1" latinLnBrk="0" marL="3200400" rtl="0">
-      <a:defRPr kern="1200" sz="1800">
+    <a:lvl8pPr marL="3200400" algn="l" defTabSz="457200" rtl="0" eaLnBrk="1" latinLnBrk="0" hangingPunct="1">
+      <a:defRPr sz="1800" kern="1200">
         <a:solidFill>
           <a:schemeClr val="tx1"/>
         </a:solidFill>
@@ -100,8 +115,8 @@
         <a:cs typeface="+mn-cs"/>
       </a:defRPr>
     </a:lvl8pPr>
-    <a:lvl9pPr algn="l" defTabSz="457200" eaLnBrk="1" hangingPunct="1" latinLnBrk="0" marL="3657600" rtl="0">
-      <a:defRPr kern="1200" sz="1800">
+    <a:lvl9pPr marL="3657600" algn="l" defTabSz="457200" rtl="0" eaLnBrk="1" latinLnBrk="0" hangingPunct="1">
+      <a:defRPr sz="1800" kern="1200">
         <a:solidFill>
           <a:schemeClr val="tx1"/>
         </a:solidFill>
@@ -111,22 +126,6 @@
       </a:defRPr>
     </a:lvl9pPr>
   </p:defaultTextStyle>
-  <p:extLst>
-    <p:ext uri="{EFAFB233-063F-42B5-8137-9DF3F51BA10A}">
-      <p15:sldGuideLst xmlns:p15="http://schemas.microsoft.com/office/powerpoint/2012/main">
-        <p15:guide id="1" orient="horz" pos="1620" userDrawn="1">
-          <p15:clr>
-            <a:srgbClr val="A4A3A4"/>
-          </p15:clr>
-        </p15:guide>
-        <p15:guide id="2" pos="2880" userDrawn="1">
-          <p15:clr>
-            <a:srgbClr val="A4A3A4"/>
-          </p15:clr>
-        </p15:guide>
-      </p15:sldGuideLst>
-    </p:ext>
-  </p:extLst>
 </p:presentation>
 </file>
 
@@ -159,8 +158,8 @@
         </p:nvSpPr>
         <p:spPr>
           <a:xfrm>
-            <a:off x="685800" y="1597819"/>
-            <a:ext cx="7772400" cy="1102519"/>
+            <a:off x="685800" y="2130425"/>
+            <a:ext cx="7772400" cy="1470025"/>
           </a:xfrm>
         </p:spPr>
         <p:txBody>
@@ -168,9 +167,10 @@
           <a:lstStyle/>
           <a:p>
             <a:r>
-              <a:rPr lang="en-US"/>
+              <a:rPr lang="en-US" smtClean="0"/>
               <a:t>Click to edit Master title style</a:t>
             </a:r>
+            <a:endParaRPr lang="en-US"/>
           </a:p>
         </p:txBody>
       </p:sp>
@@ -186,8 +186,8 @@
         </p:nvSpPr>
         <p:spPr>
           <a:xfrm>
-            <a:off x="1371600" y="2914650"/>
-            <a:ext cx="6400800" cy="1314450"/>
+            <a:off x="1371600" y="3886200"/>
+            <a:ext cx="6400800" cy="1752600"/>
           </a:xfrm>
         </p:spPr>
         <p:txBody>
@@ -203,7 +203,7 @@
                 </a:solidFill>
               </a:defRPr>
             </a:lvl1pPr>
-            <a:lvl2pPr marL="342900" indent="0" algn="ctr">
+            <a:lvl2pPr marL="457200" indent="0" algn="ctr">
               <a:buNone/>
               <a:defRPr>
                 <a:solidFill>
@@ -213,7 +213,7 @@
                 </a:solidFill>
               </a:defRPr>
             </a:lvl2pPr>
-            <a:lvl3pPr marL="685800" indent="0" algn="ctr">
+            <a:lvl3pPr marL="914400" indent="0" algn="ctr">
               <a:buNone/>
               <a:defRPr>
                 <a:solidFill>
@@ -223,7 +223,7 @@
                 </a:solidFill>
               </a:defRPr>
             </a:lvl3pPr>
-            <a:lvl4pPr marL="1028700" indent="0" algn="ctr">
+            <a:lvl4pPr marL="1371600" indent="0" algn="ctr">
               <a:buNone/>
               <a:defRPr>
                 <a:solidFill>
@@ -233,7 +233,7 @@
                 </a:solidFill>
               </a:defRPr>
             </a:lvl4pPr>
-            <a:lvl5pPr marL="1371600" indent="0" algn="ctr">
+            <a:lvl5pPr marL="1828800" indent="0" algn="ctr">
               <a:buNone/>
               <a:defRPr>
                 <a:solidFill>
@@ -243,7 +243,7 @@
                 </a:solidFill>
               </a:defRPr>
             </a:lvl5pPr>
-            <a:lvl6pPr marL="1714500" indent="0" algn="ctr">
+            <a:lvl6pPr marL="2286000" indent="0" algn="ctr">
               <a:buNone/>
               <a:defRPr>
                 <a:solidFill>
@@ -253,7 +253,7 @@
                 </a:solidFill>
               </a:defRPr>
             </a:lvl6pPr>
-            <a:lvl7pPr marL="2057400" indent="0" algn="ctr">
+            <a:lvl7pPr marL="2743200" indent="0" algn="ctr">
               <a:buNone/>
               <a:defRPr>
                 <a:solidFill>
@@ -263,7 +263,7 @@
                 </a:solidFill>
               </a:defRPr>
             </a:lvl7pPr>
-            <a:lvl8pPr marL="2400300" indent="0" algn="ctr">
+            <a:lvl8pPr marL="3200400" indent="0" algn="ctr">
               <a:buNone/>
               <a:defRPr>
                 <a:solidFill>
@@ -273,7 +273,7 @@
                 </a:solidFill>
               </a:defRPr>
             </a:lvl8pPr>
-            <a:lvl9pPr marL="2743200" indent="0" algn="ctr">
+            <a:lvl9pPr marL="3657600" indent="0" algn="ctr">
               <a:buNone/>
               <a:defRPr>
                 <a:solidFill>
@@ -286,9 +286,10 @@
           </a:lstStyle>
           <a:p>
             <a:r>
-              <a:rPr lang="en-US"/>
+              <a:rPr lang="en-US" smtClean="0"/>
               <a:t>Click to edit Master subtitle style</a:t>
             </a:r>
+            <a:endParaRPr lang="en-US"/>
           </a:p>
         </p:txBody>
       </p:sp>
@@ -307,9 +308,9 @@
           <a:bodyPr/>
           <a:lstStyle/>
           <a:p>
-            <a:fld id="{241EB5C9-1307-BA42-ABA2-0BC069CD8E7F}" type="datetimeFigureOut">
-              <a:rPr lang="en-US" smtClean="0"/>
-              <a:t>1/2/22</a:t>
+            <a:fld id="{5BCAD085-E8A6-8845-BD4E-CB4CCA059FC4}" type="datetimeFigureOut">
+              <a:rPr lang="en-US" smtClean="0"/>
+              <a:t>1/27/13</a:t>
             </a:fld>
             <a:endParaRPr lang="en-US"/>
           </a:p>
@@ -349,7 +350,7 @@
           <a:bodyPr/>
           <a:lstStyle/>
           <a:p>
-            <a:fld id="{C5EF2332-01BF-834F-8236-50238282D533}" type="slidenum">
+            <a:fld id="{C1FF6DA9-008F-8B48-92A6-B652298478BF}" type="slidenum">
               <a:rPr lang="en-US" smtClean="0"/>
               <a:t>‹#›</a:t>
             </a:fld>
@@ -360,7 +361,7 @@
     </p:spTree>
     <p:extLst>
       <p:ext uri="{BB962C8B-B14F-4D97-AF65-F5344CB8AC3E}">
-        <p14:creationId xmlns:p14="http://schemas.microsoft.com/office/powerpoint/2010/main" val="1444357513"/>
+        <p14:creationId xmlns:p14="http://schemas.microsoft.com/office/powerpoint/2010/main" val="3168075583"/>
       </p:ext>
     </p:extLst>
   </p:cSld>
@@ -403,9 +404,10 @@
           <a:lstStyle/>
           <a:p>
             <a:r>
-              <a:rPr lang="en-US"/>
+              <a:rPr lang="en-US" smtClean="0"/>
               <a:t>Click to edit Master title style</a:t>
             </a:r>
+            <a:endParaRPr lang="en-US"/>
           </a:p>
         </p:txBody>
       </p:sp>
@@ -426,37 +428,38 @@
           <a:p>
             <a:pPr lvl="0"/>
             <a:r>
-              <a:rPr lang="en-US"/>
+              <a:rPr lang="en-US" smtClean="0"/>
               <a:t>Click to edit Master text styles</a:t>
             </a:r>
           </a:p>
           <a:p>
             <a:pPr lvl="1"/>
             <a:r>
-              <a:rPr lang="en-US"/>
+              <a:rPr lang="en-US" smtClean="0"/>
               <a:t>Second level</a:t>
             </a:r>
           </a:p>
           <a:p>
             <a:pPr lvl="2"/>
             <a:r>
-              <a:rPr lang="en-US"/>
+              <a:rPr lang="en-US" smtClean="0"/>
               <a:t>Third level</a:t>
             </a:r>
           </a:p>
           <a:p>
             <a:pPr lvl="3"/>
             <a:r>
-              <a:rPr lang="en-US"/>
+              <a:rPr lang="en-US" smtClean="0"/>
               <a:t>Fourth level</a:t>
             </a:r>
           </a:p>
           <a:p>
             <a:pPr lvl="4"/>
             <a:r>
-              <a:rPr lang="en-US"/>
+              <a:rPr lang="en-US" smtClean="0"/>
               <a:t>Fifth level</a:t>
             </a:r>
+            <a:endParaRPr lang="en-US"/>
           </a:p>
         </p:txBody>
       </p:sp>
@@ -475,9 +478,9 @@
           <a:bodyPr/>
           <a:lstStyle/>
           <a:p>
-            <a:fld id="{241EB5C9-1307-BA42-ABA2-0BC069CD8E7F}" type="datetimeFigureOut">
-              <a:rPr lang="en-US" smtClean="0"/>
-              <a:t>1/2/22</a:t>
+            <a:fld id="{5BCAD085-E8A6-8845-BD4E-CB4CCA059FC4}" type="datetimeFigureOut">
+              <a:rPr lang="en-US" smtClean="0"/>
+              <a:t>1/27/13</a:t>
             </a:fld>
             <a:endParaRPr lang="en-US"/>
           </a:p>
@@ -517,7 +520,7 @@
           <a:bodyPr/>
           <a:lstStyle/>
           <a:p>
-            <a:fld id="{C5EF2332-01BF-834F-8236-50238282D533}" type="slidenum">
+            <a:fld id="{C1FF6DA9-008F-8B48-92A6-B652298478BF}" type="slidenum">
               <a:rPr lang="en-US" smtClean="0"/>
               <a:t>‹#›</a:t>
             </a:fld>
@@ -528,7 +531,7 @@
     </p:spTree>
     <p:extLst>
       <p:ext uri="{BB962C8B-B14F-4D97-AF65-F5344CB8AC3E}">
-        <p14:creationId xmlns:p14="http://schemas.microsoft.com/office/powerpoint/2010/main" val="313914798"/>
+        <p14:creationId xmlns:p14="http://schemas.microsoft.com/office/powerpoint/2010/main" val="2910927964"/>
       </p:ext>
     </p:extLst>
   </p:cSld>
@@ -567,8 +570,8 @@
         </p:nvSpPr>
         <p:spPr>
           <a:xfrm>
-            <a:off x="6629400" y="205979"/>
-            <a:ext cx="2057400" cy="4388644"/>
+            <a:off x="6629400" y="274638"/>
+            <a:ext cx="2057400" cy="5851525"/>
           </a:xfrm>
         </p:spPr>
         <p:txBody>
@@ -576,9 +579,10 @@
           <a:lstStyle/>
           <a:p>
             <a:r>
-              <a:rPr lang="en-US"/>
+              <a:rPr lang="en-US" smtClean="0"/>
               <a:t>Click to edit Master title style</a:t>
             </a:r>
+            <a:endParaRPr lang="en-US"/>
           </a:p>
         </p:txBody>
       </p:sp>
@@ -594,8 +598,8 @@
         </p:nvSpPr>
         <p:spPr>
           <a:xfrm>
-            <a:off x="457200" y="205979"/>
-            <a:ext cx="6019800" cy="4388644"/>
+            <a:off x="457200" y="274638"/>
+            <a:ext cx="6019800" cy="5851525"/>
           </a:xfrm>
         </p:spPr>
         <p:txBody>
@@ -604,37 +608,38 @@
           <a:p>
             <a:pPr lvl="0"/>
             <a:r>
-              <a:rPr lang="en-US"/>
+              <a:rPr lang="en-US" smtClean="0"/>
               <a:t>Click to edit Master text styles</a:t>
             </a:r>
           </a:p>
           <a:p>
             <a:pPr lvl="1"/>
             <a:r>
-              <a:rPr lang="en-US"/>
+              <a:rPr lang="en-US" smtClean="0"/>
               <a:t>Second level</a:t>
             </a:r>
           </a:p>
           <a:p>
             <a:pPr lvl="2"/>
             <a:r>
-              <a:rPr lang="en-US"/>
+              <a:rPr lang="en-US" smtClean="0"/>
               <a:t>Third level</a:t>
             </a:r>
           </a:p>
           <a:p>
             <a:pPr lvl="3"/>
             <a:r>
-              <a:rPr lang="en-US"/>
+              <a:rPr lang="en-US" smtClean="0"/>
               <a:t>Fourth level</a:t>
             </a:r>
           </a:p>
           <a:p>
             <a:pPr lvl="4"/>
             <a:r>
-              <a:rPr lang="en-US"/>
+              <a:rPr lang="en-US" smtClean="0"/>
               <a:t>Fifth level</a:t>
             </a:r>
+            <a:endParaRPr lang="en-US"/>
           </a:p>
         </p:txBody>
       </p:sp>
@@ -653,9 +658,9 @@
           <a:bodyPr/>
           <a:lstStyle/>
           <a:p>
-            <a:fld id="{241EB5C9-1307-BA42-ABA2-0BC069CD8E7F}" type="datetimeFigureOut">
-              <a:rPr lang="en-US" smtClean="0"/>
-              <a:t>1/2/22</a:t>
+            <a:fld id="{5BCAD085-E8A6-8845-BD4E-CB4CCA059FC4}" type="datetimeFigureOut">
+              <a:rPr lang="en-US" smtClean="0"/>
+              <a:t>1/27/13</a:t>
             </a:fld>
             <a:endParaRPr lang="en-US"/>
           </a:p>
@@ -695,7 +700,7 @@
           <a:bodyPr/>
           <a:lstStyle/>
           <a:p>
-            <a:fld id="{C5EF2332-01BF-834F-8236-50238282D533}" type="slidenum">
+            <a:fld id="{C1FF6DA9-008F-8B48-92A6-B652298478BF}" type="slidenum">
               <a:rPr lang="en-US" smtClean="0"/>
               <a:t>‹#›</a:t>
             </a:fld>
@@ -706,7 +711,7 @@
     </p:spTree>
     <p:extLst>
       <p:ext uri="{BB962C8B-B14F-4D97-AF65-F5344CB8AC3E}">
-        <p14:creationId xmlns:p14="http://schemas.microsoft.com/office/powerpoint/2010/main" val="2581529045"/>
+        <p14:creationId xmlns:p14="http://schemas.microsoft.com/office/powerpoint/2010/main" val="3612223792"/>
       </p:ext>
     </p:extLst>
   </p:cSld>
@@ -749,9 +754,10 @@
           <a:lstStyle/>
           <a:p>
             <a:r>
-              <a:rPr lang="en-US"/>
+              <a:rPr lang="en-US" smtClean="0"/>
               <a:t>Click to edit Master title style</a:t>
             </a:r>
+            <a:endParaRPr lang="en-US"/>
           </a:p>
         </p:txBody>
       </p:sp>
@@ -772,37 +778,38 @@
           <a:p>
             <a:pPr lvl="0"/>
             <a:r>
-              <a:rPr lang="en-US"/>
+              <a:rPr lang="en-US" smtClean="0"/>
               <a:t>Click to edit Master text styles</a:t>
             </a:r>
           </a:p>
           <a:p>
             <a:pPr lvl="1"/>
             <a:r>
-              <a:rPr lang="en-US"/>
+              <a:rPr lang="en-US" smtClean="0"/>
               <a:t>Second level</a:t>
             </a:r>
           </a:p>
           <a:p>
             <a:pPr lvl="2"/>
             <a:r>
-              <a:rPr lang="en-US"/>
+              <a:rPr lang="en-US" smtClean="0"/>
               <a:t>Third level</a:t>
             </a:r>
           </a:p>
           <a:p>
             <a:pPr lvl="3"/>
             <a:r>
-              <a:rPr lang="en-US"/>
+              <a:rPr lang="en-US" smtClean="0"/>
               <a:t>Fourth level</a:t>
             </a:r>
           </a:p>
           <a:p>
             <a:pPr lvl="4"/>
             <a:r>
-              <a:rPr lang="en-US"/>
+              <a:rPr lang="en-US" smtClean="0"/>
               <a:t>Fifth level</a:t>
             </a:r>
+            <a:endParaRPr lang="en-US"/>
           </a:p>
         </p:txBody>
       </p:sp>
@@ -821,9 +828,9 @@
           <a:bodyPr/>
           <a:lstStyle/>
           <a:p>
-            <a:fld id="{241EB5C9-1307-BA42-ABA2-0BC069CD8E7F}" type="datetimeFigureOut">
-              <a:rPr lang="en-US" smtClean="0"/>
-              <a:t>1/2/22</a:t>
+            <a:fld id="{5BCAD085-E8A6-8845-BD4E-CB4CCA059FC4}" type="datetimeFigureOut">
+              <a:rPr lang="en-US" smtClean="0"/>
+              <a:t>1/27/13</a:t>
             </a:fld>
             <a:endParaRPr lang="en-US"/>
           </a:p>
@@ -863,7 +870,7 @@
           <a:bodyPr/>
           <a:lstStyle/>
           <a:p>
-            <a:fld id="{C5EF2332-01BF-834F-8236-50238282D533}" type="slidenum">
+            <a:fld id="{C1FF6DA9-008F-8B48-92A6-B652298478BF}" type="slidenum">
               <a:rPr lang="en-US" smtClean="0"/>
               <a:t>‹#›</a:t>
             </a:fld>
@@ -874,7 +881,7 @@
     </p:spTree>
     <p:extLst>
       <p:ext uri="{BB962C8B-B14F-4D97-AF65-F5344CB8AC3E}">
-        <p14:creationId xmlns:p14="http://schemas.microsoft.com/office/powerpoint/2010/main" val="338346009"/>
+        <p14:creationId xmlns:p14="http://schemas.microsoft.com/office/powerpoint/2010/main" val="2614314258"/>
       </p:ext>
     </p:extLst>
   </p:cSld>
@@ -913,22 +920,23 @@
         </p:nvSpPr>
         <p:spPr>
           <a:xfrm>
-            <a:off x="722313" y="3305176"/>
-            <a:ext cx="7772400" cy="1021556"/>
+            <a:off x="722313" y="4406900"/>
+            <a:ext cx="7772400" cy="1362075"/>
           </a:xfrm>
         </p:spPr>
         <p:txBody>
           <a:bodyPr anchor="t"/>
           <a:lstStyle>
             <a:lvl1pPr algn="l">
-              <a:defRPr sz="3000" b="1" cap="all"/>
+              <a:defRPr sz="4000" b="1" cap="all"/>
             </a:lvl1pPr>
           </a:lstStyle>
           <a:p>
             <a:r>
-              <a:rPr lang="en-US"/>
+              <a:rPr lang="en-US" smtClean="0"/>
               <a:t>Click to edit Master title style</a:t>
             </a:r>
+            <a:endParaRPr lang="en-US"/>
           </a:p>
         </p:txBody>
       </p:sp>
@@ -944,8 +952,8 @@
         </p:nvSpPr>
         <p:spPr>
           <a:xfrm>
-            <a:off x="722313" y="2180035"/>
-            <a:ext cx="7772400" cy="1125140"/>
+            <a:off x="722313" y="2906713"/>
+            <a:ext cx="7772400" cy="1500187"/>
           </a:xfrm>
         </p:spPr>
         <p:txBody>
@@ -953,7 +961,7 @@
           <a:lstStyle>
             <a:lvl1pPr marL="0" indent="0">
               <a:buNone/>
-              <a:defRPr sz="1500">
+              <a:defRPr sz="2000">
                 <a:solidFill>
                   <a:schemeClr val="tx1">
                     <a:tint val="75000"/>
@@ -961,9 +969,9 @@
                 </a:solidFill>
               </a:defRPr>
             </a:lvl1pPr>
-            <a:lvl2pPr marL="342900" indent="0">
-              <a:buNone/>
-              <a:defRPr sz="1350">
+            <a:lvl2pPr marL="457200" indent="0">
+              <a:buNone/>
+              <a:defRPr sz="1800">
                 <a:solidFill>
                   <a:schemeClr val="tx1">
                     <a:tint val="75000"/>
@@ -971,9 +979,9 @@
                 </a:solidFill>
               </a:defRPr>
             </a:lvl2pPr>
-            <a:lvl3pPr marL="685800" indent="0">
-              <a:buNone/>
-              <a:defRPr sz="1200">
+            <a:lvl3pPr marL="914400" indent="0">
+              <a:buNone/>
+              <a:defRPr sz="1600">
                 <a:solidFill>
                   <a:schemeClr val="tx1">
                     <a:tint val="75000"/>
@@ -981,9 +989,9 @@
                 </a:solidFill>
               </a:defRPr>
             </a:lvl3pPr>
-            <a:lvl4pPr marL="1028700" indent="0">
-              <a:buNone/>
-              <a:defRPr sz="1050">
+            <a:lvl4pPr marL="1371600" indent="0">
+              <a:buNone/>
+              <a:defRPr sz="1400">
                 <a:solidFill>
                   <a:schemeClr val="tx1">
                     <a:tint val="75000"/>
@@ -991,9 +999,9 @@
                 </a:solidFill>
               </a:defRPr>
             </a:lvl4pPr>
-            <a:lvl5pPr marL="1371600" indent="0">
-              <a:buNone/>
-              <a:defRPr sz="1050">
+            <a:lvl5pPr marL="1828800" indent="0">
+              <a:buNone/>
+              <a:defRPr sz="1400">
                 <a:solidFill>
                   <a:schemeClr val="tx1">
                     <a:tint val="75000"/>
@@ -1001,9 +1009,9 @@
                 </a:solidFill>
               </a:defRPr>
             </a:lvl5pPr>
-            <a:lvl6pPr marL="1714500" indent="0">
-              <a:buNone/>
-              <a:defRPr sz="1050">
+            <a:lvl6pPr marL="2286000" indent="0">
+              <a:buNone/>
+              <a:defRPr sz="1400">
                 <a:solidFill>
                   <a:schemeClr val="tx1">
                     <a:tint val="75000"/>
@@ -1011,9 +1019,9 @@
                 </a:solidFill>
               </a:defRPr>
             </a:lvl6pPr>
-            <a:lvl7pPr marL="2057400" indent="0">
-              <a:buNone/>
-              <a:defRPr sz="1050">
+            <a:lvl7pPr marL="2743200" indent="0">
+              <a:buNone/>
+              <a:defRPr sz="1400">
                 <a:solidFill>
                   <a:schemeClr val="tx1">
                     <a:tint val="75000"/>
@@ -1021,9 +1029,9 @@
                 </a:solidFill>
               </a:defRPr>
             </a:lvl7pPr>
-            <a:lvl8pPr marL="2400300" indent="0">
-              <a:buNone/>
-              <a:defRPr sz="1050">
+            <a:lvl8pPr marL="3200400" indent="0">
+              <a:buNone/>
+              <a:defRPr sz="1400">
                 <a:solidFill>
                   <a:schemeClr val="tx1">
                     <a:tint val="75000"/>
@@ -1031,9 +1039,9 @@
                 </a:solidFill>
               </a:defRPr>
             </a:lvl8pPr>
-            <a:lvl9pPr marL="2743200" indent="0">
-              <a:buNone/>
-              <a:defRPr sz="1050">
+            <a:lvl9pPr marL="3657600" indent="0">
+              <a:buNone/>
+              <a:defRPr sz="1400">
                 <a:solidFill>
                   <a:schemeClr val="tx1">
                     <a:tint val="75000"/>
@@ -1045,7 +1053,7 @@
           <a:p>
             <a:pPr lvl="0"/>
             <a:r>
-              <a:rPr lang="en-US"/>
+              <a:rPr lang="en-US" smtClean="0"/>
               <a:t>Click to edit Master text styles</a:t>
             </a:r>
           </a:p>
@@ -1066,9 +1074,9 @@
           <a:bodyPr/>
           <a:lstStyle/>
           <a:p>
-            <a:fld id="{241EB5C9-1307-BA42-ABA2-0BC069CD8E7F}" type="datetimeFigureOut">
-              <a:rPr lang="en-US" smtClean="0"/>
-              <a:t>1/2/22</a:t>
+            <a:fld id="{5BCAD085-E8A6-8845-BD4E-CB4CCA059FC4}" type="datetimeFigureOut">
+              <a:rPr lang="en-US" smtClean="0"/>
+              <a:t>1/27/13</a:t>
             </a:fld>
             <a:endParaRPr lang="en-US"/>
           </a:p>
@@ -1108,7 +1116,7 @@
           <a:bodyPr/>
           <a:lstStyle/>
           <a:p>
-            <a:fld id="{C5EF2332-01BF-834F-8236-50238282D533}" type="slidenum">
+            <a:fld id="{C1FF6DA9-008F-8B48-92A6-B652298478BF}" type="slidenum">
               <a:rPr lang="en-US" smtClean="0"/>
               <a:t>‹#›</a:t>
             </a:fld>
@@ -1119,7 +1127,7 @@
     </p:spTree>
     <p:extLst>
       <p:ext uri="{BB962C8B-B14F-4D97-AF65-F5344CB8AC3E}">
-        <p14:creationId xmlns:p14="http://schemas.microsoft.com/office/powerpoint/2010/main" val="1073069076"/>
+        <p14:creationId xmlns:p14="http://schemas.microsoft.com/office/powerpoint/2010/main" val="960648375"/>
       </p:ext>
     </p:extLst>
   </p:cSld>
@@ -1162,9 +1170,10 @@
           <a:lstStyle/>
           <a:p>
             <a:r>
-              <a:rPr lang="en-US"/>
+              <a:rPr lang="en-US" smtClean="0"/>
               <a:t>Click to edit Master title style</a:t>
             </a:r>
+            <a:endParaRPr lang="en-US"/>
           </a:p>
         </p:txBody>
       </p:sp>
@@ -1180,75 +1189,76 @@
         </p:nvSpPr>
         <p:spPr>
           <a:xfrm>
-            <a:off x="457200" y="1200151"/>
-            <a:ext cx="4038600" cy="3394472"/>
+            <a:off x="457200" y="1600200"/>
+            <a:ext cx="4038600" cy="4525963"/>
           </a:xfrm>
         </p:spPr>
         <p:txBody>
           <a:bodyPr/>
           <a:lstStyle>
             <a:lvl1pPr>
-              <a:defRPr sz="2100"/>
+              <a:defRPr sz="2800"/>
             </a:lvl1pPr>
             <a:lvl2pPr>
-              <a:defRPr sz="1800"/>
+              <a:defRPr sz="2400"/>
             </a:lvl2pPr>
             <a:lvl3pPr>
-              <a:defRPr sz="1500"/>
+              <a:defRPr sz="2000"/>
             </a:lvl3pPr>
             <a:lvl4pPr>
-              <a:defRPr sz="1350"/>
+              <a:defRPr sz="1800"/>
             </a:lvl4pPr>
             <a:lvl5pPr>
-              <a:defRPr sz="1350"/>
+              <a:defRPr sz="1800"/>
             </a:lvl5pPr>
             <a:lvl6pPr>
-              <a:defRPr sz="1350"/>
+              <a:defRPr sz="1800"/>
             </a:lvl6pPr>
             <a:lvl7pPr>
-              <a:defRPr sz="1350"/>
+              <a:defRPr sz="1800"/>
             </a:lvl7pPr>
             <a:lvl8pPr>
-              <a:defRPr sz="1350"/>
+              <a:defRPr sz="1800"/>
             </a:lvl8pPr>
             <a:lvl9pPr>
-              <a:defRPr sz="1350"/>
+              <a:defRPr sz="1800"/>
             </a:lvl9pPr>
           </a:lstStyle>
           <a:p>
             <a:pPr lvl="0"/>
             <a:r>
-              <a:rPr lang="en-US"/>
+              <a:rPr lang="en-US" smtClean="0"/>
               <a:t>Click to edit Master text styles</a:t>
             </a:r>
           </a:p>
           <a:p>
             <a:pPr lvl="1"/>
             <a:r>
-              <a:rPr lang="en-US"/>
+              <a:rPr lang="en-US" smtClean="0"/>
               <a:t>Second level</a:t>
             </a:r>
           </a:p>
           <a:p>
             <a:pPr lvl="2"/>
             <a:r>
-              <a:rPr lang="en-US"/>
+              <a:rPr lang="en-US" smtClean="0"/>
               <a:t>Third level</a:t>
             </a:r>
           </a:p>
           <a:p>
             <a:pPr lvl="3"/>
             <a:r>
-              <a:rPr lang="en-US"/>
+              <a:rPr lang="en-US" smtClean="0"/>
               <a:t>Fourth level</a:t>
             </a:r>
           </a:p>
           <a:p>
             <a:pPr lvl="4"/>
             <a:r>
-              <a:rPr lang="en-US"/>
+              <a:rPr lang="en-US" smtClean="0"/>
               <a:t>Fifth level</a:t>
             </a:r>
+            <a:endParaRPr lang="en-US"/>
           </a:p>
         </p:txBody>
       </p:sp>
@@ -1264,75 +1274,76 @@
         </p:nvSpPr>
         <p:spPr>
           <a:xfrm>
-            <a:off x="4648200" y="1200151"/>
-            <a:ext cx="4038600" cy="3394472"/>
+            <a:off x="4648200" y="1600200"/>
+            <a:ext cx="4038600" cy="4525963"/>
           </a:xfrm>
         </p:spPr>
         <p:txBody>
           <a:bodyPr/>
           <a:lstStyle>
             <a:lvl1pPr>
-              <a:defRPr sz="2100"/>
+              <a:defRPr sz="2800"/>
             </a:lvl1pPr>
             <a:lvl2pPr>
-              <a:defRPr sz="1800"/>
+              <a:defRPr sz="2400"/>
             </a:lvl2pPr>
             <a:lvl3pPr>
-              <a:defRPr sz="1500"/>
+              <a:defRPr sz="2000"/>
             </a:lvl3pPr>
             <a:lvl4pPr>
-              <a:defRPr sz="1350"/>
+              <a:defRPr sz="1800"/>
             </a:lvl4pPr>
             <a:lvl5pPr>
-              <a:defRPr sz="1350"/>
+              <a:defRPr sz="1800"/>
             </a:lvl5pPr>
             <a:lvl6pPr>
-              <a:defRPr sz="1350"/>
+              <a:defRPr sz="1800"/>
             </a:lvl6pPr>
             <a:lvl7pPr>
-              <a:defRPr sz="1350"/>
+              <a:defRPr sz="1800"/>
             </a:lvl7pPr>
             <a:lvl8pPr>
-              <a:defRPr sz="1350"/>
+              <a:defRPr sz="1800"/>
             </a:lvl8pPr>
             <a:lvl9pPr>
-              <a:defRPr sz="1350"/>
+              <a:defRPr sz="1800"/>
             </a:lvl9pPr>
           </a:lstStyle>
           <a:p>
             <a:pPr lvl="0"/>
             <a:r>
-              <a:rPr lang="en-US"/>
+              <a:rPr lang="en-US" smtClean="0"/>
               <a:t>Click to edit Master text styles</a:t>
             </a:r>
           </a:p>
           <a:p>
             <a:pPr lvl="1"/>
             <a:r>
-              <a:rPr lang="en-US"/>
+              <a:rPr lang="en-US" smtClean="0"/>
               <a:t>Second level</a:t>
             </a:r>
           </a:p>
           <a:p>
             <a:pPr lvl="2"/>
             <a:r>
-              <a:rPr lang="en-US"/>
+              <a:rPr lang="en-US" smtClean="0"/>
               <a:t>Third level</a:t>
             </a:r>
           </a:p>
           <a:p>
             <a:pPr lvl="3"/>
             <a:r>
-              <a:rPr lang="en-US"/>
+              <a:rPr lang="en-US" smtClean="0"/>
               <a:t>Fourth level</a:t>
             </a:r>
           </a:p>
           <a:p>
             <a:pPr lvl="4"/>
             <a:r>
-              <a:rPr lang="en-US"/>
+              <a:rPr lang="en-US" smtClean="0"/>
               <a:t>Fifth level</a:t>
             </a:r>
+            <a:endParaRPr lang="en-US"/>
           </a:p>
         </p:txBody>
       </p:sp>
@@ -1351,9 +1362,9 @@
           <a:bodyPr/>
           <a:lstStyle/>
           <a:p>
-            <a:fld id="{241EB5C9-1307-BA42-ABA2-0BC069CD8E7F}" type="datetimeFigureOut">
-              <a:rPr lang="en-US" smtClean="0"/>
-              <a:t>1/2/22</a:t>
+            <a:fld id="{5BCAD085-E8A6-8845-BD4E-CB4CCA059FC4}" type="datetimeFigureOut">
+              <a:rPr lang="en-US" smtClean="0"/>
+              <a:t>1/27/13</a:t>
             </a:fld>
             <a:endParaRPr lang="en-US"/>
           </a:p>
@@ -1393,7 +1404,7 @@
           <a:bodyPr/>
           <a:lstStyle/>
           <a:p>
-            <a:fld id="{C5EF2332-01BF-834F-8236-50238282D533}" type="slidenum">
+            <a:fld id="{C1FF6DA9-008F-8B48-92A6-B652298478BF}" type="slidenum">
               <a:rPr lang="en-US" smtClean="0"/>
               <a:t>‹#›</a:t>
             </a:fld>
@@ -1404,7 +1415,7 @@
     </p:spTree>
     <p:extLst>
       <p:ext uri="{BB962C8B-B14F-4D97-AF65-F5344CB8AC3E}">
-        <p14:creationId xmlns:p14="http://schemas.microsoft.com/office/powerpoint/2010/main" val="2619886245"/>
+        <p14:creationId xmlns:p14="http://schemas.microsoft.com/office/powerpoint/2010/main" val="2782244947"/>
       </p:ext>
     </p:extLst>
   </p:cSld>
@@ -1451,9 +1462,10 @@
           </a:lstStyle>
           <a:p>
             <a:r>
-              <a:rPr lang="en-US"/>
+              <a:rPr lang="en-US" smtClean="0"/>
               <a:t>Click to edit Master title style</a:t>
             </a:r>
+            <a:endParaRPr lang="en-US"/>
           </a:p>
         </p:txBody>
       </p:sp>
@@ -1469,8 +1481,8 @@
         </p:nvSpPr>
         <p:spPr>
           <a:xfrm>
-            <a:off x="457200" y="1151335"/>
-            <a:ext cx="4040188" cy="479822"/>
+            <a:off x="457200" y="1535113"/>
+            <a:ext cx="4040188" cy="639762"/>
           </a:xfrm>
         </p:spPr>
         <p:txBody>
@@ -1478,45 +1490,45 @@
           <a:lstStyle>
             <a:lvl1pPr marL="0" indent="0">
               <a:buNone/>
+              <a:defRPr sz="2400" b="1"/>
+            </a:lvl1pPr>
+            <a:lvl2pPr marL="457200" indent="0">
+              <a:buNone/>
+              <a:defRPr sz="2000" b="1"/>
+            </a:lvl2pPr>
+            <a:lvl3pPr marL="914400" indent="0">
+              <a:buNone/>
               <a:defRPr sz="1800" b="1"/>
-            </a:lvl1pPr>
-            <a:lvl2pPr marL="342900" indent="0">
-              <a:buNone/>
-              <a:defRPr sz="1500" b="1"/>
-            </a:lvl2pPr>
-            <a:lvl3pPr marL="685800" indent="0">
-              <a:buNone/>
-              <a:defRPr sz="1350" b="1"/>
             </a:lvl3pPr>
-            <a:lvl4pPr marL="1028700" indent="0">
-              <a:buNone/>
-              <a:defRPr sz="1200" b="1"/>
+            <a:lvl4pPr marL="1371600" indent="0">
+              <a:buNone/>
+              <a:defRPr sz="1600" b="1"/>
             </a:lvl4pPr>
-            <a:lvl5pPr marL="1371600" indent="0">
-              <a:buNone/>
-              <a:defRPr sz="1200" b="1"/>
+            <a:lvl5pPr marL="1828800" indent="0">
+              <a:buNone/>
+              <a:defRPr sz="1600" b="1"/>
             </a:lvl5pPr>
-            <a:lvl6pPr marL="1714500" indent="0">
-              <a:buNone/>
-              <a:defRPr sz="1200" b="1"/>
+            <a:lvl6pPr marL="2286000" indent="0">
+              <a:buNone/>
+              <a:defRPr sz="1600" b="1"/>
             </a:lvl6pPr>
-            <a:lvl7pPr marL="2057400" indent="0">
-              <a:buNone/>
-              <a:defRPr sz="1200" b="1"/>
+            <a:lvl7pPr marL="2743200" indent="0">
+              <a:buNone/>
+              <a:defRPr sz="1600" b="1"/>
             </a:lvl7pPr>
-            <a:lvl8pPr marL="2400300" indent="0">
-              <a:buNone/>
-              <a:defRPr sz="1200" b="1"/>
+            <a:lvl8pPr marL="3200400" indent="0">
+              <a:buNone/>
+              <a:defRPr sz="1600" b="1"/>
             </a:lvl8pPr>
-            <a:lvl9pPr marL="2743200" indent="0">
-              <a:buNone/>
-              <a:defRPr sz="1200" b="1"/>
+            <a:lvl9pPr marL="3657600" indent="0">
+              <a:buNone/>
+              <a:defRPr sz="1600" b="1"/>
             </a:lvl9pPr>
           </a:lstStyle>
           <a:p>
             <a:pPr lvl="0"/>
             <a:r>
-              <a:rPr lang="en-US"/>
+              <a:rPr lang="en-US" smtClean="0"/>
               <a:t>Click to edit Master text styles</a:t>
             </a:r>
           </a:p>
@@ -1534,75 +1546,76 @@
         </p:nvSpPr>
         <p:spPr>
           <a:xfrm>
-            <a:off x="457200" y="1631156"/>
-            <a:ext cx="4040188" cy="2963466"/>
+            <a:off x="457200" y="2174875"/>
+            <a:ext cx="4040188" cy="3951288"/>
           </a:xfrm>
         </p:spPr>
         <p:txBody>
           <a:bodyPr/>
           <a:lstStyle>
             <a:lvl1pPr>
-              <a:defRPr sz="1800"/>
+              <a:defRPr sz="2400"/>
             </a:lvl1pPr>
             <a:lvl2pPr>
-              <a:defRPr sz="1500"/>
+              <a:defRPr sz="2000"/>
             </a:lvl2pPr>
             <a:lvl3pPr>
-              <a:defRPr sz="1350"/>
+              <a:defRPr sz="1800"/>
             </a:lvl3pPr>
             <a:lvl4pPr>
-              <a:defRPr sz="1200"/>
+              <a:defRPr sz="1600"/>
             </a:lvl4pPr>
             <a:lvl5pPr>
-              <a:defRPr sz="1200"/>
+              <a:defRPr sz="1600"/>
             </a:lvl5pPr>
             <a:lvl6pPr>
-              <a:defRPr sz="1200"/>
+              <a:defRPr sz="1600"/>
             </a:lvl6pPr>
             <a:lvl7pPr>
-              <a:defRPr sz="1200"/>
+              <a:defRPr sz="1600"/>
             </a:lvl7pPr>
             <a:lvl8pPr>
-              <a:defRPr sz="1200"/>
+              <a:defRPr sz="1600"/>
             </a:lvl8pPr>
             <a:lvl9pPr>
-              <a:defRPr sz="1200"/>
+              <a:defRPr sz="1600"/>
             </a:lvl9pPr>
           </a:lstStyle>
           <a:p>
             <a:pPr lvl="0"/>
             <a:r>
-              <a:rPr lang="en-US"/>
+              <a:rPr lang="en-US" smtClean="0"/>
               <a:t>Click to edit Master text styles</a:t>
             </a:r>
           </a:p>
           <a:p>
             <a:pPr lvl="1"/>
             <a:r>
-              <a:rPr lang="en-US"/>
+              <a:rPr lang="en-US" smtClean="0"/>
               <a:t>Second level</a:t>
             </a:r>
           </a:p>
           <a:p>
             <a:pPr lvl="2"/>
             <a:r>
-              <a:rPr lang="en-US"/>
+              <a:rPr lang="en-US" smtClean="0"/>
               <a:t>Third level</a:t>
             </a:r>
           </a:p>
           <a:p>
             <a:pPr lvl="3"/>
             <a:r>
-              <a:rPr lang="en-US"/>
+              <a:rPr lang="en-US" smtClean="0"/>
               <a:t>Fourth level</a:t>
             </a:r>
           </a:p>
           <a:p>
             <a:pPr lvl="4"/>
             <a:r>
-              <a:rPr lang="en-US"/>
+              <a:rPr lang="en-US" smtClean="0"/>
               <a:t>Fifth level</a:t>
             </a:r>
+            <a:endParaRPr lang="en-US"/>
           </a:p>
         </p:txBody>
       </p:sp>
@@ -1618,8 +1631,8 @@
         </p:nvSpPr>
         <p:spPr>
           <a:xfrm>
-            <a:off x="4645026" y="1151335"/>
-            <a:ext cx="4041775" cy="479822"/>
+            <a:off x="4645025" y="1535113"/>
+            <a:ext cx="4041775" cy="639762"/>
           </a:xfrm>
         </p:spPr>
         <p:txBody>
@@ -1627,45 +1640,45 @@
           <a:lstStyle>
             <a:lvl1pPr marL="0" indent="0">
               <a:buNone/>
+              <a:defRPr sz="2400" b="1"/>
+            </a:lvl1pPr>
+            <a:lvl2pPr marL="457200" indent="0">
+              <a:buNone/>
+              <a:defRPr sz="2000" b="1"/>
+            </a:lvl2pPr>
+            <a:lvl3pPr marL="914400" indent="0">
+              <a:buNone/>
               <a:defRPr sz="1800" b="1"/>
-            </a:lvl1pPr>
-            <a:lvl2pPr marL="342900" indent="0">
-              <a:buNone/>
-              <a:defRPr sz="1500" b="1"/>
-            </a:lvl2pPr>
-            <a:lvl3pPr marL="685800" indent="0">
-              <a:buNone/>
-              <a:defRPr sz="1350" b="1"/>
             </a:lvl3pPr>
-            <a:lvl4pPr marL="1028700" indent="0">
-              <a:buNone/>
-              <a:defRPr sz="1200" b="1"/>
+            <a:lvl4pPr marL="1371600" indent="0">
+              <a:buNone/>
+              <a:defRPr sz="1600" b="1"/>
             </a:lvl4pPr>
-            <a:lvl5pPr marL="1371600" indent="0">
-              <a:buNone/>
-              <a:defRPr sz="1200" b="1"/>
+            <a:lvl5pPr marL="1828800" indent="0">
+              <a:buNone/>
+              <a:defRPr sz="1600" b="1"/>
             </a:lvl5pPr>
-            <a:lvl6pPr marL="1714500" indent="0">
-              <a:buNone/>
-              <a:defRPr sz="1200" b="1"/>
+            <a:lvl6pPr marL="2286000" indent="0">
+              <a:buNone/>
+              <a:defRPr sz="1600" b="1"/>
             </a:lvl6pPr>
-            <a:lvl7pPr marL="2057400" indent="0">
-              <a:buNone/>
-              <a:defRPr sz="1200" b="1"/>
+            <a:lvl7pPr marL="2743200" indent="0">
+              <a:buNone/>
+              <a:defRPr sz="1600" b="1"/>
             </a:lvl7pPr>
-            <a:lvl8pPr marL="2400300" indent="0">
-              <a:buNone/>
-              <a:defRPr sz="1200" b="1"/>
+            <a:lvl8pPr marL="3200400" indent="0">
+              <a:buNone/>
+              <a:defRPr sz="1600" b="1"/>
             </a:lvl8pPr>
-            <a:lvl9pPr marL="2743200" indent="0">
-              <a:buNone/>
-              <a:defRPr sz="1200" b="1"/>
+            <a:lvl9pPr marL="3657600" indent="0">
+              <a:buNone/>
+              <a:defRPr sz="1600" b="1"/>
             </a:lvl9pPr>
           </a:lstStyle>
           <a:p>
             <a:pPr lvl="0"/>
             <a:r>
-              <a:rPr lang="en-US"/>
+              <a:rPr lang="en-US" smtClean="0"/>
               <a:t>Click to edit Master text styles</a:t>
             </a:r>
           </a:p>
@@ -1683,75 +1696,76 @@
         </p:nvSpPr>
         <p:spPr>
           <a:xfrm>
-            <a:off x="4645026" y="1631156"/>
-            <a:ext cx="4041775" cy="2963466"/>
+            <a:off x="4645025" y="2174875"/>
+            <a:ext cx="4041775" cy="3951288"/>
           </a:xfrm>
         </p:spPr>
         <p:txBody>
           <a:bodyPr/>
           <a:lstStyle>
             <a:lvl1pPr>
-              <a:defRPr sz="1800"/>
+              <a:defRPr sz="2400"/>
             </a:lvl1pPr>
             <a:lvl2pPr>
-              <a:defRPr sz="1500"/>
+              <a:defRPr sz="2000"/>
             </a:lvl2pPr>
             <a:lvl3pPr>
-              <a:defRPr sz="1350"/>
+              <a:defRPr sz="1800"/>
             </a:lvl3pPr>
             <a:lvl4pPr>
-              <a:defRPr sz="1200"/>
+              <a:defRPr sz="1600"/>
             </a:lvl4pPr>
             <a:lvl5pPr>
-              <a:defRPr sz="1200"/>
+              <a:defRPr sz="1600"/>
             </a:lvl5pPr>
             <a:lvl6pPr>
-              <a:defRPr sz="1200"/>
+              <a:defRPr sz="1600"/>
             </a:lvl6pPr>
             <a:lvl7pPr>
-              <a:defRPr sz="1200"/>
+              <a:defRPr sz="1600"/>
             </a:lvl7pPr>
             <a:lvl8pPr>
-              <a:defRPr sz="1200"/>
+              <a:defRPr sz="1600"/>
             </a:lvl8pPr>
             <a:lvl9pPr>
-              <a:defRPr sz="1200"/>
+              <a:defRPr sz="1600"/>
             </a:lvl9pPr>
           </a:lstStyle>
           <a:p>
             <a:pPr lvl="0"/>
             <a:r>
-              <a:rPr lang="en-US"/>
+              <a:rPr lang="en-US" smtClean="0"/>
               <a:t>Click to edit Master text styles</a:t>
             </a:r>
           </a:p>
           <a:p>
             <a:pPr lvl="1"/>
             <a:r>
-              <a:rPr lang="en-US"/>
+              <a:rPr lang="en-US" smtClean="0"/>
               <a:t>Second level</a:t>
             </a:r>
           </a:p>
           <a:p>
             <a:pPr lvl="2"/>
             <a:r>
-              <a:rPr lang="en-US"/>
+              <a:rPr lang="en-US" smtClean="0"/>
               <a:t>Third level</a:t>
             </a:r>
           </a:p>
           <a:p>
             <a:pPr lvl="3"/>
             <a:r>
-              <a:rPr lang="en-US"/>
+              <a:rPr lang="en-US" smtClean="0"/>
               <a:t>Fourth level</a:t>
             </a:r>
           </a:p>
           <a:p>
             <a:pPr lvl="4"/>
             <a:r>
-              <a:rPr lang="en-US"/>
+              <a:rPr lang="en-US" smtClean="0"/>
               <a:t>Fifth level</a:t>
             </a:r>
+            <a:endParaRPr lang="en-US"/>
           </a:p>
         </p:txBody>
       </p:sp>
@@ -1770,9 +1784,9 @@
           <a:bodyPr/>
           <a:lstStyle/>
           <a:p>
-            <a:fld id="{241EB5C9-1307-BA42-ABA2-0BC069CD8E7F}" type="datetimeFigureOut">
-              <a:rPr lang="en-US" smtClean="0"/>
-              <a:t>1/2/22</a:t>
+            <a:fld id="{5BCAD085-E8A6-8845-BD4E-CB4CCA059FC4}" type="datetimeFigureOut">
+              <a:rPr lang="en-US" smtClean="0"/>
+              <a:t>1/27/13</a:t>
             </a:fld>
             <a:endParaRPr lang="en-US"/>
           </a:p>
@@ -1812,7 +1826,7 @@
           <a:bodyPr/>
           <a:lstStyle/>
           <a:p>
-            <a:fld id="{C5EF2332-01BF-834F-8236-50238282D533}" type="slidenum">
+            <a:fld id="{C1FF6DA9-008F-8B48-92A6-B652298478BF}" type="slidenum">
               <a:rPr lang="en-US" smtClean="0"/>
               <a:t>‹#›</a:t>
             </a:fld>
@@ -1823,7 +1837,7 @@
     </p:spTree>
     <p:extLst>
       <p:ext uri="{BB962C8B-B14F-4D97-AF65-F5344CB8AC3E}">
-        <p14:creationId xmlns:p14="http://schemas.microsoft.com/office/powerpoint/2010/main" val="2535793967"/>
+        <p14:creationId xmlns:p14="http://schemas.microsoft.com/office/powerpoint/2010/main" val="990158736"/>
       </p:ext>
     </p:extLst>
   </p:cSld>
@@ -1866,9 +1880,10 @@
           <a:lstStyle/>
           <a:p>
             <a:r>
-              <a:rPr lang="en-US"/>
+              <a:rPr lang="en-US" smtClean="0"/>
               <a:t>Click to edit Master title style</a:t>
             </a:r>
+            <a:endParaRPr lang="en-US"/>
           </a:p>
         </p:txBody>
       </p:sp>
@@ -1887,9 +1902,9 @@
           <a:bodyPr/>
           <a:lstStyle/>
           <a:p>
-            <a:fld id="{241EB5C9-1307-BA42-ABA2-0BC069CD8E7F}" type="datetimeFigureOut">
-              <a:rPr lang="en-US" smtClean="0"/>
-              <a:t>1/2/22</a:t>
+            <a:fld id="{5BCAD085-E8A6-8845-BD4E-CB4CCA059FC4}" type="datetimeFigureOut">
+              <a:rPr lang="en-US" smtClean="0"/>
+              <a:t>1/27/13</a:t>
             </a:fld>
             <a:endParaRPr lang="en-US"/>
           </a:p>
@@ -1929,7 +1944,7 @@
           <a:bodyPr/>
           <a:lstStyle/>
           <a:p>
-            <a:fld id="{C5EF2332-01BF-834F-8236-50238282D533}" type="slidenum">
+            <a:fld id="{C1FF6DA9-008F-8B48-92A6-B652298478BF}" type="slidenum">
               <a:rPr lang="en-US" smtClean="0"/>
               <a:t>‹#›</a:t>
             </a:fld>
@@ -1940,7 +1955,7 @@
     </p:spTree>
     <p:extLst>
       <p:ext uri="{BB962C8B-B14F-4D97-AF65-F5344CB8AC3E}">
-        <p14:creationId xmlns:p14="http://schemas.microsoft.com/office/powerpoint/2010/main" val="3472721253"/>
+        <p14:creationId xmlns:p14="http://schemas.microsoft.com/office/powerpoint/2010/main" val="727027711"/>
       </p:ext>
     </p:extLst>
   </p:cSld>
@@ -1982,9 +1997,9 @@
           <a:bodyPr/>
           <a:lstStyle/>
           <a:p>
-            <a:fld id="{241EB5C9-1307-BA42-ABA2-0BC069CD8E7F}" type="datetimeFigureOut">
-              <a:rPr lang="en-US" smtClean="0"/>
-              <a:t>1/2/22</a:t>
+            <a:fld id="{5BCAD085-E8A6-8845-BD4E-CB4CCA059FC4}" type="datetimeFigureOut">
+              <a:rPr lang="en-US" smtClean="0"/>
+              <a:t>1/27/13</a:t>
             </a:fld>
             <a:endParaRPr lang="en-US"/>
           </a:p>
@@ -2024,7 +2039,7 @@
           <a:bodyPr/>
           <a:lstStyle/>
           <a:p>
-            <a:fld id="{C5EF2332-01BF-834F-8236-50238282D533}" type="slidenum">
+            <a:fld id="{C1FF6DA9-008F-8B48-92A6-B652298478BF}" type="slidenum">
               <a:rPr lang="en-US" smtClean="0"/>
               <a:t>‹#›</a:t>
             </a:fld>
@@ -2035,7 +2050,7 @@
     </p:spTree>
     <p:extLst>
       <p:ext uri="{BB962C8B-B14F-4D97-AF65-F5344CB8AC3E}">
-        <p14:creationId xmlns:p14="http://schemas.microsoft.com/office/powerpoint/2010/main" val="2130901097"/>
+        <p14:creationId xmlns:p14="http://schemas.microsoft.com/office/powerpoint/2010/main" val="1212999818"/>
       </p:ext>
     </p:extLst>
   </p:cSld>
@@ -2074,22 +2089,23 @@
         </p:nvSpPr>
         <p:spPr>
           <a:xfrm>
-            <a:off x="457201" y="204787"/>
-            <a:ext cx="3008313" cy="871538"/>
+            <a:off x="457200" y="273050"/>
+            <a:ext cx="3008313" cy="1162050"/>
           </a:xfrm>
         </p:spPr>
         <p:txBody>
           <a:bodyPr anchor="b"/>
           <a:lstStyle>
             <a:lvl1pPr algn="l">
-              <a:defRPr sz="1500" b="1"/>
+              <a:defRPr sz="2000" b="1"/>
             </a:lvl1pPr>
           </a:lstStyle>
           <a:p>
             <a:r>
-              <a:rPr lang="en-US"/>
+              <a:rPr lang="en-US" smtClean="0"/>
               <a:t>Click to edit Master title style</a:t>
             </a:r>
+            <a:endParaRPr lang="en-US"/>
           </a:p>
         </p:txBody>
       </p:sp>
@@ -2105,75 +2121,76 @@
         </p:nvSpPr>
         <p:spPr>
           <a:xfrm>
-            <a:off x="3575050" y="204788"/>
-            <a:ext cx="5111750" cy="4389835"/>
+            <a:off x="3575050" y="273050"/>
+            <a:ext cx="5111750" cy="5853113"/>
           </a:xfrm>
         </p:spPr>
         <p:txBody>
           <a:bodyPr/>
           <a:lstStyle>
             <a:lvl1pPr>
-              <a:defRPr sz="2400"/>
+              <a:defRPr sz="3200"/>
             </a:lvl1pPr>
             <a:lvl2pPr>
-              <a:defRPr sz="2100"/>
+              <a:defRPr sz="2800"/>
             </a:lvl2pPr>
             <a:lvl3pPr>
-              <a:defRPr sz="1800"/>
+              <a:defRPr sz="2400"/>
             </a:lvl3pPr>
             <a:lvl4pPr>
-              <a:defRPr sz="1500"/>
+              <a:defRPr sz="2000"/>
             </a:lvl4pPr>
             <a:lvl5pPr>
-              <a:defRPr sz="1500"/>
+              <a:defRPr sz="2000"/>
             </a:lvl5pPr>
             <a:lvl6pPr>
-              <a:defRPr sz="1500"/>
+              <a:defRPr sz="2000"/>
             </a:lvl6pPr>
             <a:lvl7pPr>
-              <a:defRPr sz="1500"/>
+              <a:defRPr sz="2000"/>
             </a:lvl7pPr>
             <a:lvl8pPr>
-              <a:defRPr sz="1500"/>
+              <a:defRPr sz="2000"/>
             </a:lvl8pPr>
             <a:lvl9pPr>
-              <a:defRPr sz="1500"/>
+              <a:defRPr sz="2000"/>
             </a:lvl9pPr>
           </a:lstStyle>
           <a:p>
             <a:pPr lvl="0"/>
             <a:r>
-              <a:rPr lang="en-US"/>
+              <a:rPr lang="en-US" smtClean="0"/>
               <a:t>Click to edit Master text styles</a:t>
             </a:r>
           </a:p>
           <a:p>
             <a:pPr lvl="1"/>
             <a:r>
-              <a:rPr lang="en-US"/>
+              <a:rPr lang="en-US" smtClean="0"/>
               <a:t>Second level</a:t>
             </a:r>
           </a:p>
           <a:p>
             <a:pPr lvl="2"/>
             <a:r>
-              <a:rPr lang="en-US"/>
+              <a:rPr lang="en-US" smtClean="0"/>
               <a:t>Third level</a:t>
             </a:r>
           </a:p>
           <a:p>
             <a:pPr lvl="3"/>
             <a:r>
-              <a:rPr lang="en-US"/>
+              <a:rPr lang="en-US" smtClean="0"/>
               <a:t>Fourth level</a:t>
             </a:r>
           </a:p>
           <a:p>
             <a:pPr lvl="4"/>
             <a:r>
-              <a:rPr lang="en-US"/>
+              <a:rPr lang="en-US" smtClean="0"/>
               <a:t>Fifth level</a:t>
             </a:r>
+            <a:endParaRPr lang="en-US"/>
           </a:p>
         </p:txBody>
       </p:sp>
@@ -2189,8 +2206,8 @@
         </p:nvSpPr>
         <p:spPr>
           <a:xfrm>
-            <a:off x="457201" y="1076326"/>
-            <a:ext cx="3008313" cy="3518297"/>
+            <a:off x="457200" y="1435100"/>
+            <a:ext cx="3008313" cy="4691063"/>
           </a:xfrm>
         </p:spPr>
         <p:txBody>
@@ -2198,45 +2215,45 @@
           <a:lstStyle>
             <a:lvl1pPr marL="0" indent="0">
               <a:buNone/>
-              <a:defRPr sz="1050"/>
+              <a:defRPr sz="1400"/>
             </a:lvl1pPr>
-            <a:lvl2pPr marL="342900" indent="0">
+            <a:lvl2pPr marL="457200" indent="0">
+              <a:buNone/>
+              <a:defRPr sz="1200"/>
+            </a:lvl2pPr>
+            <a:lvl3pPr marL="914400" indent="0">
+              <a:buNone/>
+              <a:defRPr sz="1000"/>
+            </a:lvl3pPr>
+            <a:lvl4pPr marL="1371600" indent="0">
               <a:buNone/>
               <a:defRPr sz="900"/>
-            </a:lvl2pPr>
-            <a:lvl3pPr marL="685800" indent="0">
-              <a:buNone/>
-              <a:defRPr sz="750"/>
-            </a:lvl3pPr>
-            <a:lvl4pPr marL="1028700" indent="0">
-              <a:buNone/>
-              <a:defRPr sz="675"/>
             </a:lvl4pPr>
-            <a:lvl5pPr marL="1371600" indent="0">
-              <a:buNone/>
-              <a:defRPr sz="675"/>
+            <a:lvl5pPr marL="1828800" indent="0">
+              <a:buNone/>
+              <a:defRPr sz="900"/>
             </a:lvl5pPr>
-            <a:lvl6pPr marL="1714500" indent="0">
-              <a:buNone/>
-              <a:defRPr sz="675"/>
+            <a:lvl6pPr marL="2286000" indent="0">
+              <a:buNone/>
+              <a:defRPr sz="900"/>
             </a:lvl6pPr>
-            <a:lvl7pPr marL="2057400" indent="0">
-              <a:buNone/>
-              <a:defRPr sz="675"/>
+            <a:lvl7pPr marL="2743200" indent="0">
+              <a:buNone/>
+              <a:defRPr sz="900"/>
             </a:lvl7pPr>
-            <a:lvl8pPr marL="2400300" indent="0">
-              <a:buNone/>
-              <a:defRPr sz="675"/>
+            <a:lvl8pPr marL="3200400" indent="0">
+              <a:buNone/>
+              <a:defRPr sz="900"/>
             </a:lvl8pPr>
-            <a:lvl9pPr marL="2743200" indent="0">
-              <a:buNone/>
-              <a:defRPr sz="675"/>
+            <a:lvl9pPr marL="3657600" indent="0">
+              <a:buNone/>
+              <a:defRPr sz="900"/>
             </a:lvl9pPr>
           </a:lstStyle>
           <a:p>
             <a:pPr lvl="0"/>
             <a:r>
-              <a:rPr lang="en-US"/>
+              <a:rPr lang="en-US" smtClean="0"/>
               <a:t>Click to edit Master text styles</a:t>
             </a:r>
           </a:p>
@@ -2257,9 +2274,9 @@
           <a:bodyPr/>
           <a:lstStyle/>
           <a:p>
-            <a:fld id="{241EB5C9-1307-BA42-ABA2-0BC069CD8E7F}" type="datetimeFigureOut">
-              <a:rPr lang="en-US" smtClean="0"/>
-              <a:t>1/2/22</a:t>
+            <a:fld id="{5BCAD085-E8A6-8845-BD4E-CB4CCA059FC4}" type="datetimeFigureOut">
+              <a:rPr lang="en-US" smtClean="0"/>
+              <a:t>1/27/13</a:t>
             </a:fld>
             <a:endParaRPr lang="en-US"/>
           </a:p>
@@ -2299,7 +2316,7 @@
           <a:bodyPr/>
           <a:lstStyle/>
           <a:p>
-            <a:fld id="{C5EF2332-01BF-834F-8236-50238282D533}" type="slidenum">
+            <a:fld id="{C1FF6DA9-008F-8B48-92A6-B652298478BF}" type="slidenum">
               <a:rPr lang="en-US" smtClean="0"/>
               <a:t>‹#›</a:t>
             </a:fld>
@@ -2310,7 +2327,7 @@
     </p:spTree>
     <p:extLst>
       <p:ext uri="{BB962C8B-B14F-4D97-AF65-F5344CB8AC3E}">
-        <p14:creationId xmlns:p14="http://schemas.microsoft.com/office/powerpoint/2010/main" val="3540895647"/>
+        <p14:creationId xmlns:p14="http://schemas.microsoft.com/office/powerpoint/2010/main" val="1840726560"/>
       </p:ext>
     </p:extLst>
   </p:cSld>
@@ -2349,22 +2366,23 @@
         </p:nvSpPr>
         <p:spPr>
           <a:xfrm>
-            <a:off x="1792288" y="3600450"/>
-            <a:ext cx="5486400" cy="425054"/>
+            <a:off x="1792288" y="4800600"/>
+            <a:ext cx="5486400" cy="566738"/>
           </a:xfrm>
         </p:spPr>
         <p:txBody>
           <a:bodyPr anchor="b"/>
           <a:lstStyle>
             <a:lvl1pPr algn="l">
-              <a:defRPr sz="1500" b="1"/>
+              <a:defRPr sz="2000" b="1"/>
             </a:lvl1pPr>
           </a:lstStyle>
           <a:p>
             <a:r>
-              <a:rPr lang="en-US"/>
+              <a:rPr lang="en-US" smtClean="0"/>
               <a:t>Click to edit Master title style</a:t>
             </a:r>
+            <a:endParaRPr lang="en-US"/>
           </a:p>
         </p:txBody>
       </p:sp>
@@ -2380,8 +2398,8 @@
         </p:nvSpPr>
         <p:spPr>
           <a:xfrm>
-            <a:off x="1792288" y="459581"/>
-            <a:ext cx="5486400" cy="3086100"/>
+            <a:off x="1792288" y="612775"/>
+            <a:ext cx="5486400" cy="4114800"/>
           </a:xfrm>
         </p:spPr>
         <p:txBody>
@@ -2389,39 +2407,39 @@
           <a:lstStyle>
             <a:lvl1pPr marL="0" indent="0">
               <a:buNone/>
+              <a:defRPr sz="3200"/>
+            </a:lvl1pPr>
+            <a:lvl2pPr marL="457200" indent="0">
+              <a:buNone/>
+              <a:defRPr sz="2800"/>
+            </a:lvl2pPr>
+            <a:lvl3pPr marL="914400" indent="0">
+              <a:buNone/>
               <a:defRPr sz="2400"/>
-            </a:lvl1pPr>
-            <a:lvl2pPr marL="342900" indent="0">
-              <a:buNone/>
-              <a:defRPr sz="2100"/>
-            </a:lvl2pPr>
-            <a:lvl3pPr marL="685800" indent="0">
-              <a:buNone/>
-              <a:defRPr sz="1800"/>
             </a:lvl3pPr>
-            <a:lvl4pPr marL="1028700" indent="0">
-              <a:buNone/>
-              <a:defRPr sz="1500"/>
+            <a:lvl4pPr marL="1371600" indent="0">
+              <a:buNone/>
+              <a:defRPr sz="2000"/>
             </a:lvl4pPr>
-            <a:lvl5pPr marL="1371600" indent="0">
-              <a:buNone/>
-              <a:defRPr sz="1500"/>
+            <a:lvl5pPr marL="1828800" indent="0">
+              <a:buNone/>
+              <a:defRPr sz="2000"/>
             </a:lvl5pPr>
-            <a:lvl6pPr marL="1714500" indent="0">
-              <a:buNone/>
-              <a:defRPr sz="1500"/>
+            <a:lvl6pPr marL="2286000" indent="0">
+              <a:buNone/>
+              <a:defRPr sz="2000"/>
             </a:lvl6pPr>
-            <a:lvl7pPr marL="2057400" indent="0">
-              <a:buNone/>
-              <a:defRPr sz="1500"/>
+            <a:lvl7pPr marL="2743200" indent="0">
+              <a:buNone/>
+              <a:defRPr sz="2000"/>
             </a:lvl7pPr>
-            <a:lvl8pPr marL="2400300" indent="0">
-              <a:buNone/>
-              <a:defRPr sz="1500"/>
+            <a:lvl8pPr marL="3200400" indent="0">
+              <a:buNone/>
+              <a:defRPr sz="2000"/>
             </a:lvl8pPr>
-            <a:lvl9pPr marL="2743200" indent="0">
-              <a:buNone/>
-              <a:defRPr sz="1500"/>
+            <a:lvl9pPr marL="3657600" indent="0">
+              <a:buNone/>
+              <a:defRPr sz="2000"/>
             </a:lvl9pPr>
           </a:lstStyle>
           <a:p>
@@ -2441,8 +2459,8 @@
         </p:nvSpPr>
         <p:spPr>
           <a:xfrm>
-            <a:off x="1792288" y="4025503"/>
-            <a:ext cx="5486400" cy="603647"/>
+            <a:off x="1792288" y="5367338"/>
+            <a:ext cx="5486400" cy="804862"/>
           </a:xfrm>
         </p:spPr>
         <p:txBody>
@@ -2450,45 +2468,45 @@
           <a:lstStyle>
             <a:lvl1pPr marL="0" indent="0">
               <a:buNone/>
-              <a:defRPr sz="1050"/>
+              <a:defRPr sz="1400"/>
             </a:lvl1pPr>
-            <a:lvl2pPr marL="342900" indent="0">
+            <a:lvl2pPr marL="457200" indent="0">
+              <a:buNone/>
+              <a:defRPr sz="1200"/>
+            </a:lvl2pPr>
+            <a:lvl3pPr marL="914400" indent="0">
+              <a:buNone/>
+              <a:defRPr sz="1000"/>
+            </a:lvl3pPr>
+            <a:lvl4pPr marL="1371600" indent="0">
               <a:buNone/>
               <a:defRPr sz="900"/>
-            </a:lvl2pPr>
-            <a:lvl3pPr marL="685800" indent="0">
-              <a:buNone/>
-              <a:defRPr sz="750"/>
-            </a:lvl3pPr>
-            <a:lvl4pPr marL="1028700" indent="0">
-              <a:buNone/>
-              <a:defRPr sz="675"/>
             </a:lvl4pPr>
-            <a:lvl5pPr marL="1371600" indent="0">
-              <a:buNone/>
-              <a:defRPr sz="675"/>
+            <a:lvl5pPr marL="1828800" indent="0">
+              <a:buNone/>
+              <a:defRPr sz="900"/>
             </a:lvl5pPr>
-            <a:lvl6pPr marL="1714500" indent="0">
-              <a:buNone/>
-              <a:defRPr sz="675"/>
+            <a:lvl6pPr marL="2286000" indent="0">
+              <a:buNone/>
+              <a:defRPr sz="900"/>
             </a:lvl6pPr>
-            <a:lvl7pPr marL="2057400" indent="0">
-              <a:buNone/>
-              <a:defRPr sz="675"/>
+            <a:lvl7pPr marL="2743200" indent="0">
+              <a:buNone/>
+              <a:defRPr sz="900"/>
             </a:lvl7pPr>
-            <a:lvl8pPr marL="2400300" indent="0">
-              <a:buNone/>
-              <a:defRPr sz="675"/>
+            <a:lvl8pPr marL="3200400" indent="0">
+              <a:buNone/>
+              <a:defRPr sz="900"/>
             </a:lvl8pPr>
-            <a:lvl9pPr marL="2743200" indent="0">
-              <a:buNone/>
-              <a:defRPr sz="675"/>
+            <a:lvl9pPr marL="3657600" indent="0">
+              <a:buNone/>
+              <a:defRPr sz="900"/>
             </a:lvl9pPr>
           </a:lstStyle>
           <a:p>
             <a:pPr lvl="0"/>
             <a:r>
-              <a:rPr lang="en-US"/>
+              <a:rPr lang="en-US" smtClean="0"/>
               <a:t>Click to edit Master text styles</a:t>
             </a:r>
           </a:p>
@@ -2509,9 +2527,9 @@
           <a:bodyPr/>
           <a:lstStyle/>
           <a:p>
-            <a:fld id="{241EB5C9-1307-BA42-ABA2-0BC069CD8E7F}" type="datetimeFigureOut">
-              <a:rPr lang="en-US" smtClean="0"/>
-              <a:t>1/2/22</a:t>
+            <a:fld id="{5BCAD085-E8A6-8845-BD4E-CB4CCA059FC4}" type="datetimeFigureOut">
+              <a:rPr lang="en-US" smtClean="0"/>
+              <a:t>1/27/13</a:t>
             </a:fld>
             <a:endParaRPr lang="en-US"/>
           </a:p>
@@ -2551,7 +2569,7 @@
           <a:bodyPr/>
           <a:lstStyle/>
           <a:p>
-            <a:fld id="{C5EF2332-01BF-834F-8236-50238282D533}" type="slidenum">
+            <a:fld id="{C1FF6DA9-008F-8B48-92A6-B652298478BF}" type="slidenum">
               <a:rPr lang="en-US" smtClean="0"/>
               <a:t>‹#›</a:t>
             </a:fld>
@@ -2562,7 +2580,7 @@
     </p:spTree>
     <p:extLst>
       <p:ext uri="{BB962C8B-B14F-4D97-AF65-F5344CB8AC3E}">
-        <p14:creationId xmlns:p14="http://schemas.microsoft.com/office/powerpoint/2010/main" val="3566899855"/>
+        <p14:creationId xmlns:p14="http://schemas.microsoft.com/office/powerpoint/2010/main" val="3889236939"/>
       </p:ext>
     </p:extLst>
   </p:cSld>
@@ -2573,7 +2591,7 @@
 </file>
 
 <file path=ppt/slideMasters/slideMaster1.xml><?xml version="1.0" encoding="utf-8"?>
-<p:sldMaster xmlns:a="http://schemas.openxmlformats.org/drawingml/2006/main" xmlns:p="http://schemas.openxmlformats.org/presentationml/2006/main" xmlns:r="http://schemas.openxmlformats.org/officeDocument/2006/relationships">
+<p:sldMaster xmlns:a="http://schemas.openxmlformats.org/drawingml/2006/main" xmlns:r="http://schemas.openxmlformats.org/officeDocument/2006/relationships" xmlns:p="http://schemas.openxmlformats.org/presentationml/2006/main">
   <p:cSld>
     <p:bg>
       <p:bgRef idx="1001">
@@ -2606,23 +2624,24 @@
         </p:nvSpPr>
         <p:spPr>
           <a:xfrm>
-            <a:off x="457200" y="205979"/>
-            <a:ext cx="8229600" cy="857250"/>
+            <a:off x="457200" y="274638"/>
+            <a:ext cx="8229600" cy="1143000"/>
           </a:xfrm>
           <a:prstGeom prst="rect">
             <a:avLst/>
           </a:prstGeom>
         </p:spPr>
         <p:txBody>
-          <a:bodyPr anchor="ctr" bIns="45720" lIns="91440" rIns="91440" rtlCol="0" tIns="45720" vert="horz">
+          <a:bodyPr vert="horz" lIns="91440" tIns="45720" rIns="91440" bIns="45720" rtlCol="0" anchor="ctr">
             <a:normAutofit/>
           </a:bodyPr>
           <a:lstStyle/>
           <a:p>
             <a:r>
-              <a:rPr lang="en-US"/>
+              <a:rPr lang="en-US" smtClean="0"/>
               <a:t>Click to edit Master title style</a:t>
             </a:r>
+            <a:endParaRPr lang="en-US"/>
           </a:p>
         </p:txBody>
       </p:sp>
@@ -2633,57 +2652,58 @@
             <a:spLocks noGrp="1"/>
           </p:cNvSpPr>
           <p:nvPr>
-            <p:ph idx="1" type="body"/>
+            <p:ph type="body" idx="1"/>
           </p:nvPr>
         </p:nvSpPr>
         <p:spPr>
           <a:xfrm>
-            <a:off x="457200" y="1200151"/>
-            <a:ext cx="8229600" cy="3394472"/>
+            <a:off x="457200" y="1600200"/>
+            <a:ext cx="8229600" cy="4525963"/>
           </a:xfrm>
           <a:prstGeom prst="rect">
             <a:avLst/>
           </a:prstGeom>
         </p:spPr>
         <p:txBody>
-          <a:bodyPr bIns="45720" lIns="91440" rIns="91440" rtlCol="0" tIns="45720" vert="horz">
+          <a:bodyPr vert="horz" lIns="91440" tIns="45720" rIns="91440" bIns="45720" rtlCol="0">
             <a:normAutofit/>
           </a:bodyPr>
           <a:lstStyle/>
           <a:p>
             <a:pPr lvl="0"/>
             <a:r>
-              <a:rPr lang="en-US"/>
+              <a:rPr lang="en-US" smtClean="0"/>
               <a:t>Click to edit Master text styles</a:t>
             </a:r>
           </a:p>
           <a:p>
             <a:pPr lvl="1"/>
             <a:r>
-              <a:rPr lang="en-US"/>
+              <a:rPr lang="en-US" smtClean="0"/>
               <a:t>Second level</a:t>
             </a:r>
           </a:p>
           <a:p>
             <a:pPr lvl="2"/>
             <a:r>
-              <a:rPr lang="en-US"/>
+              <a:rPr lang="en-US" smtClean="0"/>
               <a:t>Third level</a:t>
             </a:r>
           </a:p>
           <a:p>
             <a:pPr lvl="3"/>
             <a:r>
-              <a:rPr lang="en-US"/>
+              <a:rPr lang="en-US" smtClean="0"/>
               <a:t>Fourth level</a:t>
             </a:r>
           </a:p>
           <a:p>
             <a:pPr lvl="4"/>
             <a:r>
-              <a:rPr lang="en-US"/>
+              <a:rPr lang="en-US" smtClean="0"/>
               <a:t>Fifth level</a:t>
             </a:r>
+            <a:endParaRPr lang="en-US"/>
           </a:p>
         </p:txBody>
       </p:sp>
@@ -2694,23 +2714,23 @@
             <a:spLocks noGrp="1"/>
           </p:cNvSpPr>
           <p:nvPr>
-            <p:ph idx="2" sz="half" type="dt"/>
+            <p:ph type="dt" sz="half" idx="2"/>
           </p:nvPr>
         </p:nvSpPr>
         <p:spPr>
           <a:xfrm>
-            <a:off x="457200" y="4767263"/>
-            <a:ext cx="2133600" cy="273844"/>
+            <a:off x="457200" y="6356350"/>
+            <a:ext cx="2133600" cy="365125"/>
           </a:xfrm>
           <a:prstGeom prst="rect">
             <a:avLst/>
           </a:prstGeom>
         </p:spPr>
         <p:txBody>
-          <a:bodyPr anchor="ctr" bIns="45720" lIns="91440" rIns="91440" rtlCol="0" tIns="45720" vert="horz"/>
+          <a:bodyPr vert="horz" lIns="91440" tIns="45720" rIns="91440" bIns="45720" rtlCol="0" anchor="ctr"/>
           <a:lstStyle>
             <a:lvl1pPr algn="l">
-              <a:defRPr sz="900">
+              <a:defRPr sz="1200">
                 <a:solidFill>
                   <a:schemeClr val="tx1">
                     <a:tint val="75000"/>
@@ -2720,9 +2740,9 @@
             </a:lvl1pPr>
           </a:lstStyle>
           <a:p>
-            <a:fld id="{241EB5C9-1307-BA42-ABA2-0BC069CD8E7F}" type="datetimeFigureOut">
-              <a:rPr lang="en-US" smtClean="0"/>
-              <a:t>1/2/22</a:t>
+            <a:fld id="{5BCAD085-E8A6-8845-BD4E-CB4CCA059FC4}" type="datetimeFigureOut">
+              <a:rPr lang="en-US" smtClean="0"/>
+              <a:t>1/27/13</a:t>
             </a:fld>
             <a:endParaRPr lang="en-US"/>
           </a:p>
@@ -2735,23 +2755,23 @@
             <a:spLocks noGrp="1"/>
           </p:cNvSpPr>
           <p:nvPr>
-            <p:ph idx="3" sz="quarter" type="ftr"/>
+            <p:ph type="ftr" sz="quarter" idx="3"/>
           </p:nvPr>
         </p:nvSpPr>
         <p:spPr>
           <a:xfrm>
-            <a:off x="3124200" y="4767263"/>
-            <a:ext cx="2895600" cy="273844"/>
+            <a:off x="3124200" y="6356350"/>
+            <a:ext cx="2895600" cy="365125"/>
           </a:xfrm>
           <a:prstGeom prst="rect">
             <a:avLst/>
           </a:prstGeom>
         </p:spPr>
         <p:txBody>
-          <a:bodyPr anchor="ctr" bIns="45720" lIns="91440" rIns="91440" rtlCol="0" tIns="45720" vert="horz"/>
+          <a:bodyPr vert="horz" lIns="91440" tIns="45720" rIns="91440" bIns="45720" rtlCol="0" anchor="ctr"/>
           <a:lstStyle>
             <a:lvl1pPr algn="ctr">
-              <a:defRPr sz="900">
+              <a:defRPr sz="1200">
                 <a:solidFill>
                   <a:schemeClr val="tx1">
                     <a:tint val="75000"/>
@@ -2772,23 +2792,23 @@
             <a:spLocks noGrp="1"/>
           </p:cNvSpPr>
           <p:nvPr>
-            <p:ph idx="4" sz="quarter" type="sldNum"/>
+            <p:ph type="sldNum" sz="quarter" idx="4"/>
           </p:nvPr>
         </p:nvSpPr>
         <p:spPr>
           <a:xfrm>
-            <a:off x="6553200" y="4767263"/>
-            <a:ext cx="2133600" cy="273844"/>
+            <a:off x="6553200" y="6356350"/>
+            <a:ext cx="2133600" cy="365125"/>
           </a:xfrm>
           <a:prstGeom prst="rect">
             <a:avLst/>
           </a:prstGeom>
         </p:spPr>
         <p:txBody>
-          <a:bodyPr anchor="ctr" bIns="45720" lIns="91440" rIns="91440" rtlCol="0" tIns="45720" vert="horz"/>
+          <a:bodyPr vert="horz" lIns="91440" tIns="45720" rIns="91440" bIns="45720" rtlCol="0" anchor="ctr"/>
           <a:lstStyle>
             <a:lvl1pPr algn="r">
-              <a:defRPr sz="900">
+              <a:defRPr sz="1200">
                 <a:solidFill>
                   <a:schemeClr val="tx1">
                     <a:tint val="75000"/>
@@ -2798,7 +2818,7 @@
             </a:lvl1pPr>
           </a:lstStyle>
           <a:p>
-            <a:fld id="{C5EF2332-01BF-834F-8236-50238282D533}" type="slidenum">
+            <a:fld id="{C1FF6DA9-008F-8B48-92A6-B652298478BF}" type="slidenum">
               <a:rPr lang="en-US" smtClean="0"/>
               <a:t>‹#›</a:t>
             </a:fld>
@@ -2809,11 +2829,11 @@
     </p:spTree>
     <p:extLst>
       <p:ext uri="{BB962C8B-B14F-4D97-AF65-F5344CB8AC3E}">
-        <p14:creationId xmlns:p14="http://schemas.microsoft.com/office/powerpoint/2010/main" val="3676200875"/>
+        <p14:creationId xmlns:p14="http://schemas.microsoft.com/office/powerpoint/2010/main" val="2209977519"/>
       </p:ext>
     </p:extLst>
   </p:cSld>
-  <p:clrMap accent1="accent1" accent2="accent2" accent3="accent3" accent4="accent4" accent5="accent5" accent6="accent6" bg1="lt1" bg2="lt2" folHlink="folHlink" hlink="hlink" tx1="dk1" tx2="dk2"/>
+  <p:clrMap bg1="lt1" tx1="dk1" bg2="lt2" tx2="dk2" accent1="accent1" accent2="accent2" accent3="accent3" accent4="accent4" accent5="accent5" accent6="accent6" hlink="hlink" folHlink="folHlink"/>
   <p:sldLayoutIdLst>
     <p:sldLayoutId id="2147483649" r:id="rId1"/>
     <p:sldLayoutId id="2147483650" r:id="rId2"/>
@@ -2829,12 +2849,12 @@
   </p:sldLayoutIdLst>
   <p:txStyles>
     <p:titleStyle>
-      <a:lvl1pPr algn="ctr" defTabSz="342900" eaLnBrk="1" hangingPunct="1" latinLnBrk="0" rtl="0">
+      <a:lvl1pPr algn="ctr" defTabSz="457200" rtl="0" eaLnBrk="1" latinLnBrk="0" hangingPunct="1">
         <a:spcBef>
           <a:spcPct val="0"/>
         </a:spcBef>
         <a:buNone/>
-        <a:defRPr kern="1200" sz="3300">
+        <a:defRPr sz="4400" kern="1200">
           <a:solidFill>
             <a:schemeClr val="tx1"/>
           </a:solidFill>
@@ -2845,13 +2865,13 @@
       </a:lvl1pPr>
     </p:titleStyle>
     <p:bodyStyle>
-      <a:lvl1pPr algn="l" defTabSz="342900" eaLnBrk="1" hangingPunct="1" indent="-342900" latinLnBrk="0" marL="342900" rtl="0">
+      <a:lvl1pPr marL="342900" indent="-342900" algn="l" defTabSz="457200" rtl="0" eaLnBrk="1" latinLnBrk="0" hangingPunct="1">
         <a:spcBef>
           <a:spcPct val="20000"/>
         </a:spcBef>
         <a:buFont typeface="Arial"/>
         <a:buChar char="•"/>
-        <a:defRPr kern="1200" sz="2400">
+        <a:defRPr sz="3200" kern="1200">
           <a:solidFill>
             <a:schemeClr val="tx1"/>
           </a:solidFill>
@@ -2860,13 +2880,13 @@
           <a:cs typeface="+mn-cs"/>
         </a:defRPr>
       </a:lvl1pPr>
-      <a:lvl2pPr algn="l" defTabSz="342900" eaLnBrk="1" hangingPunct="1" indent="-342900" latinLnBrk="0" marL="685800" rtl="0">
+      <a:lvl2pPr marL="742950" indent="-285750" algn="l" defTabSz="457200" rtl="0" eaLnBrk="1" latinLnBrk="0" hangingPunct="1">
         <a:spcBef>
           <a:spcPct val="20000"/>
         </a:spcBef>
         <a:buFont typeface="Arial"/>
         <a:buChar char="–"/>
-        <a:defRPr kern="1200" sz="2100">
+        <a:defRPr sz="2800" kern="1200">
           <a:solidFill>
             <a:schemeClr val="tx1"/>
           </a:solidFill>
@@ -2875,13 +2895,13 @@
           <a:cs typeface="+mn-cs"/>
         </a:defRPr>
       </a:lvl2pPr>
-      <a:lvl3pPr algn="l" defTabSz="342900" eaLnBrk="1" hangingPunct="1" indent="-342900" latinLnBrk="0" marL="1028700" rtl="0">
+      <a:lvl3pPr marL="1143000" indent="-228600" algn="l" defTabSz="457200" rtl="0" eaLnBrk="1" latinLnBrk="0" hangingPunct="1">
         <a:spcBef>
           <a:spcPct val="20000"/>
         </a:spcBef>
         <a:buFont typeface="Arial"/>
         <a:buChar char="•"/>
-        <a:defRPr kern="1200" sz="1800">
+        <a:defRPr sz="2400" kern="1200">
           <a:solidFill>
             <a:schemeClr val="tx1"/>
           </a:solidFill>
@@ -2890,13 +2910,13 @@
           <a:cs typeface="+mn-cs"/>
         </a:defRPr>
       </a:lvl3pPr>
-      <a:lvl4pPr algn="l" defTabSz="342900" eaLnBrk="1" hangingPunct="1" indent="-342900" latinLnBrk="0" marL="1371600" rtl="0">
+      <a:lvl4pPr marL="1600200" indent="-228600" algn="l" defTabSz="457200" rtl="0" eaLnBrk="1" latinLnBrk="0" hangingPunct="1">
         <a:spcBef>
           <a:spcPct val="20000"/>
         </a:spcBef>
         <a:buFont typeface="Arial"/>
         <a:buChar char="–"/>
-        <a:defRPr kern="1200" sz="1500">
+        <a:defRPr sz="2000" kern="1200">
           <a:solidFill>
             <a:schemeClr val="tx1"/>
           </a:solidFill>
@@ -2905,13 +2925,13 @@
           <a:cs typeface="+mn-cs"/>
         </a:defRPr>
       </a:lvl4pPr>
-      <a:lvl5pPr algn="l" defTabSz="342900" eaLnBrk="1" hangingPunct="1" indent="-342900" latinLnBrk="0" marL="1714500" rtl="0">
+      <a:lvl5pPr marL="2057400" indent="-228600" algn="l" defTabSz="457200" rtl="0" eaLnBrk="1" latinLnBrk="0" hangingPunct="1">
         <a:spcBef>
           <a:spcPct val="20000"/>
         </a:spcBef>
         <a:buFont typeface="Arial"/>
         <a:buChar char="»"/>
-        <a:defRPr kern="1200" sz="1500">
+        <a:defRPr sz="2000" kern="1200">
           <a:solidFill>
             <a:schemeClr val="tx1"/>
           </a:solidFill>
@@ -2920,13 +2940,13 @@
           <a:cs typeface="+mn-cs"/>
         </a:defRPr>
       </a:lvl5pPr>
-      <a:lvl6pPr algn="l" defTabSz="342900" eaLnBrk="1" hangingPunct="1" indent="-342900" latinLnBrk="0" marL="2057400" rtl="0">
+      <a:lvl6pPr marL="2514600" indent="-228600" algn="l" defTabSz="457200" rtl="0" eaLnBrk="1" latinLnBrk="0" hangingPunct="1">
         <a:spcBef>
           <a:spcPct val="20000"/>
         </a:spcBef>
         <a:buFont typeface="Arial"/>
         <a:buChar char="•"/>
-        <a:defRPr kern="1200" sz="1500">
+        <a:defRPr sz="2000" kern="1200">
           <a:solidFill>
             <a:schemeClr val="tx1"/>
           </a:solidFill>
@@ -2935,13 +2955,13 @@
           <a:cs typeface="+mn-cs"/>
         </a:defRPr>
       </a:lvl6pPr>
-      <a:lvl7pPr algn="l" defTabSz="342900" eaLnBrk="1" hangingPunct="1" indent="-342900" latinLnBrk="0" marL="2400300" rtl="0">
+      <a:lvl7pPr marL="2971800" indent="-228600" algn="l" defTabSz="457200" rtl="0" eaLnBrk="1" latinLnBrk="0" hangingPunct="1">
         <a:spcBef>
           <a:spcPct val="20000"/>
         </a:spcBef>
         <a:buFont typeface="Arial"/>
         <a:buChar char="•"/>
-        <a:defRPr kern="1200" sz="1500">
+        <a:defRPr sz="2000" kern="1200">
           <a:solidFill>
             <a:schemeClr val="tx1"/>
           </a:solidFill>
@@ -2950,13 +2970,13 @@
           <a:cs typeface="+mn-cs"/>
         </a:defRPr>
       </a:lvl7pPr>
-      <a:lvl8pPr algn="l" defTabSz="342900" eaLnBrk="1" hangingPunct="1" indent="-342900" latinLnBrk="0" marL="2743200" rtl="0">
+      <a:lvl8pPr marL="3429000" indent="-228600" algn="l" defTabSz="457200" rtl="0" eaLnBrk="1" latinLnBrk="0" hangingPunct="1">
         <a:spcBef>
           <a:spcPct val="20000"/>
         </a:spcBef>
         <a:buFont typeface="Arial"/>
         <a:buChar char="•"/>
-        <a:defRPr kern="1200" sz="1500">
+        <a:defRPr sz="2000" kern="1200">
           <a:solidFill>
             <a:schemeClr val="tx1"/>
           </a:solidFill>
@@ -2965,13 +2985,13 @@
           <a:cs typeface="+mn-cs"/>
         </a:defRPr>
       </a:lvl8pPr>
-      <a:lvl9pPr algn="l" defTabSz="342900" eaLnBrk="1" hangingPunct="1" indent="-342900" latinLnBrk="0" marL="3086100" rtl="0">
+      <a:lvl9pPr marL="3886200" indent="-228600" algn="l" defTabSz="457200" rtl="0" eaLnBrk="1" latinLnBrk="0" hangingPunct="1">
         <a:spcBef>
           <a:spcPct val="20000"/>
         </a:spcBef>
         <a:buFont typeface="Arial"/>
         <a:buChar char="•"/>
-        <a:defRPr kern="1200" sz="1500">
+        <a:defRPr sz="2000" kern="1200">
           <a:solidFill>
             <a:schemeClr val="tx1"/>
           </a:solidFill>
@@ -2985,8 +3005,8 @@
       <a:defPPr>
         <a:defRPr lang="en-US"/>
       </a:defPPr>
-      <a:lvl1pPr algn="l" defTabSz="342900" eaLnBrk="1" hangingPunct="1" latinLnBrk="0" marL="0" rtl="0">
-        <a:defRPr kern="1200" sz="1350">
+      <a:lvl1pPr marL="0" algn="l" defTabSz="457200" rtl="0" eaLnBrk="1" latinLnBrk="0" hangingPunct="1">
+        <a:defRPr sz="1800" kern="1200">
           <a:solidFill>
             <a:schemeClr val="tx1"/>
           </a:solidFill>
@@ -2995,8 +3015,8 @@
           <a:cs typeface="+mn-cs"/>
         </a:defRPr>
       </a:lvl1pPr>
-      <a:lvl2pPr algn="l" defTabSz="342900" eaLnBrk="1" hangingPunct="1" latinLnBrk="0" marL="342900" rtl="0">
-        <a:defRPr kern="1200" sz="1350">
+      <a:lvl2pPr marL="457200" algn="l" defTabSz="457200" rtl="0" eaLnBrk="1" latinLnBrk="0" hangingPunct="1">
+        <a:defRPr sz="1800" kern="1200">
           <a:solidFill>
             <a:schemeClr val="tx1"/>
           </a:solidFill>
@@ -3005,8 +3025,8 @@
           <a:cs typeface="+mn-cs"/>
         </a:defRPr>
       </a:lvl2pPr>
-      <a:lvl3pPr algn="l" defTabSz="342900" eaLnBrk="1" hangingPunct="1" latinLnBrk="0" marL="685800" rtl="0">
-        <a:defRPr kern="1200" sz="1350">
+      <a:lvl3pPr marL="914400" algn="l" defTabSz="457200" rtl="0" eaLnBrk="1" latinLnBrk="0" hangingPunct="1">
+        <a:defRPr sz="1800" kern="1200">
           <a:solidFill>
             <a:schemeClr val="tx1"/>
           </a:solidFill>
@@ -3015,8 +3035,8 @@
           <a:cs typeface="+mn-cs"/>
         </a:defRPr>
       </a:lvl3pPr>
-      <a:lvl4pPr algn="l" defTabSz="342900" eaLnBrk="1" hangingPunct="1" latinLnBrk="0" marL="1028700" rtl="0">
-        <a:defRPr kern="1200" sz="1350">
+      <a:lvl4pPr marL="1371600" algn="l" defTabSz="457200" rtl="0" eaLnBrk="1" latinLnBrk="0" hangingPunct="1">
+        <a:defRPr sz="1800" kern="1200">
           <a:solidFill>
             <a:schemeClr val="tx1"/>
           </a:solidFill>
@@ -3025,8 +3045,8 @@
           <a:cs typeface="+mn-cs"/>
         </a:defRPr>
       </a:lvl4pPr>
-      <a:lvl5pPr algn="l" defTabSz="342900" eaLnBrk="1" hangingPunct="1" latinLnBrk="0" marL="1371600" rtl="0">
-        <a:defRPr kern="1200" sz="1350">
+      <a:lvl5pPr marL="1828800" algn="l" defTabSz="457200" rtl="0" eaLnBrk="1" latinLnBrk="0" hangingPunct="1">
+        <a:defRPr sz="1800" kern="1200">
           <a:solidFill>
             <a:schemeClr val="tx1"/>
           </a:solidFill>
@@ -3035,8 +3055,8 @@
           <a:cs typeface="+mn-cs"/>
         </a:defRPr>
       </a:lvl5pPr>
-      <a:lvl6pPr algn="l" defTabSz="342900" eaLnBrk="1" hangingPunct="1" latinLnBrk="0" marL="1714500" rtl="0">
-        <a:defRPr kern="1200" sz="1350">
+      <a:lvl6pPr marL="2286000" algn="l" defTabSz="457200" rtl="0" eaLnBrk="1" latinLnBrk="0" hangingPunct="1">
+        <a:defRPr sz="1800" kern="1200">
           <a:solidFill>
             <a:schemeClr val="tx1"/>
           </a:solidFill>
@@ -3045,8 +3065,8 @@
           <a:cs typeface="+mn-cs"/>
         </a:defRPr>
       </a:lvl6pPr>
-      <a:lvl7pPr algn="l" defTabSz="342900" eaLnBrk="1" hangingPunct="1" latinLnBrk="0" marL="2057400" rtl="0">
-        <a:defRPr kern="1200" sz="1350">
+      <a:lvl7pPr marL="2743200" algn="l" defTabSz="457200" rtl="0" eaLnBrk="1" latinLnBrk="0" hangingPunct="1">
+        <a:defRPr sz="1800" kern="1200">
           <a:solidFill>
             <a:schemeClr val="tx1"/>
           </a:solidFill>
@@ -3055,8 +3075,8 @@
           <a:cs typeface="+mn-cs"/>
         </a:defRPr>
       </a:lvl7pPr>
-      <a:lvl8pPr algn="l" defTabSz="342900" eaLnBrk="1" hangingPunct="1" latinLnBrk="0" marL="2400300" rtl="0">
-        <a:defRPr kern="1200" sz="1350">
+      <a:lvl8pPr marL="3200400" algn="l" defTabSz="457200" rtl="0" eaLnBrk="1" latinLnBrk="0" hangingPunct="1">
+        <a:defRPr sz="1800" kern="1200">
           <a:solidFill>
             <a:schemeClr val="tx1"/>
           </a:solidFill>
@@ -3065,8 +3085,8 @@
           <a:cs typeface="+mn-cs"/>
         </a:defRPr>
       </a:lvl8pPr>
-      <a:lvl9pPr algn="l" defTabSz="342900" eaLnBrk="1" hangingPunct="1" latinLnBrk="0" marL="2743200" rtl="0">
-        <a:defRPr kern="1200" sz="1350">
+      <a:lvl9pPr marL="3657600" algn="l" defTabSz="457200" rtl="0" eaLnBrk="1" latinLnBrk="0" hangingPunct="1">
+        <a:defRPr sz="1800" kern="1200">
           <a:solidFill>
             <a:schemeClr val="tx1"/>
           </a:solidFill>
@@ -3081,7 +3101,7 @@
 </file>
 
 <file path=ppt/slides/slide1.xml><?xml version="1.0" encoding="utf-8"?>
-<p:sld xmlns:a="http://schemas.openxmlformats.org/drawingml/2006/main" xmlns:r="http://schemas.openxmlformats.org/officeDocument/2006/relationships" xmlns:p="http://schemas.openxmlformats.org/presentationml/2006/main">
+<p:sld xmlns:a="http://schemas.openxmlformats.org/drawingml/2006/main" xmlns:p="http://schemas.openxmlformats.org/presentationml/2006/main" xmlns:r="http://schemas.openxmlformats.org/officeDocument/2006/relationships">
   <p:cSld>
     <p:spTree>
       <p:nvGrpSpPr>
@@ -3089,14 +3109,7 @@
         <p:cNvGrpSpPr/>
         <p:nvPr/>
       </p:nvGrpSpPr>
-      <p:grpSpPr>
-        <a:xfrm>
-          <a:off x="0" y="0"/>
-          <a:ext cx="0" cy="0"/>
-          <a:chOff x="0" y="0"/>
-          <a:chExt cx="0" cy="0"/>
-        </a:xfrm>
-      </p:grpSpPr>
+      <p:grpSpPr/>
       <p:sp>
         <p:nvSpPr>
           <p:cNvPr id="2" name="Title 1"/>
@@ -3112,11 +3125,7 @@
           <a:bodyPr/>
           <a:lstStyle/>
           <a:p>
-            <a:pPr lvl="0" indent="0" marL="0">
-              <a:buNone/>
-            </a:pPr>
-            <a:r>
-              <a:rPr/>
+            <a:r>
               <a:t>Marp サンプル</a:t>
             </a:r>
           </a:p>
@@ -3124,44 +3133,38 @@
       </p:sp>
       <p:sp>
         <p:nvSpPr>
-          <p:cNvPr id="3" name="Content Placeholder 2"/>
-          <p:cNvSpPr>
-            <a:spLocks noGrp="1"/>
-          </p:cNvSpPr>
-          <p:nvPr>
-            <p:ph idx="1"/>
-          </p:nvPr>
-        </p:nvSpPr>
-        <p:spPr/>
-        <p:txBody>
-          <a:bodyPr/>
-          <a:lstStyle/>
-          <a:p>
-            <a:pPr lvl="0" indent="0" marL="0">
-              <a:buNone/>
-            </a:pPr>
-          </a:p>
-          <a:p>
-            <a:pPr lvl="0" indent="0" marL="0">
-              <a:spcBef>
-                <a:spcPts val="3000"/>
-              </a:spcBef>
-              <a:buNone/>
-            </a:pPr>
-            <a:r>
-              <a:rPr b="1"/>
-              <a:t>theme: my-theme</a:t>
-            </a:r>
-          </a:p>
+          <p:cNvPr id="3" name="TextBox 2"/>
+          <p:cNvSpPr txBox="1"/>
+          <p:nvPr/>
+        </p:nvSpPr>
+        <p:spPr>
+          <a:xfrm>
+            <a:off x="457200" y="1371600"/>
+            <a:ext cx="8229600" cy="4572000"/>
+          </a:xfrm>
+          <a:prstGeom prst="rect">
+            <a:avLst/>
+          </a:prstGeom>
+          <a:noFill/>
+        </p:spPr>
+        <p:txBody>
+          <a:bodyPr wrap="none">
+            <a:spAutoFit/>
+          </a:bodyPr>
+          <a:lstStyle/>
+          <a:p/>
         </p:txBody>
       </p:sp>
     </p:spTree>
   </p:cSld>
+  <p:clrMapOvr>
+    <a:masterClrMapping/>
+  </p:clrMapOvr>
 </p:sld>
 </file>
 
-<file path=ppt/slides/slide2.xml><?xml version="1.0" encoding="utf-8"?>
-<p:sld xmlns:a="http://schemas.openxmlformats.org/drawingml/2006/main" xmlns:r="http://schemas.openxmlformats.org/officeDocument/2006/relationships" xmlns:p="http://schemas.openxmlformats.org/presentationml/2006/main">
+<file path=ppt/slides/slide10.xml><?xml version="1.0" encoding="utf-8"?>
+<p:sld xmlns:a="http://schemas.openxmlformats.org/drawingml/2006/main" xmlns:p="http://schemas.openxmlformats.org/presentationml/2006/main" xmlns:r="http://schemas.openxmlformats.org/officeDocument/2006/relationships">
   <p:cSld>
     <p:spTree>
       <p:nvGrpSpPr>
@@ -3169,133 +3172,62 @@
         <p:cNvGrpSpPr/>
         <p:nvPr/>
       </p:nvGrpSpPr>
-      <p:grpSpPr>
-        <a:xfrm>
-          <a:off x="0" y="0"/>
-          <a:ext cx="0" cy="0"/>
-          <a:chOff x="0" y="0"/>
-          <a:chExt cx="0" cy="0"/>
-        </a:xfrm>
-      </p:grpSpPr>
-      <p:sp>
-        <p:nvSpPr>
-          <p:cNvPr id="3" name="Content Placeholder 2"/>
-          <p:cNvSpPr>
-            <a:spLocks noGrp="1"/>
-          </p:cNvSpPr>
-          <p:nvPr>
-            <p:ph idx="1"/>
-          </p:nvPr>
-        </p:nvSpPr>
-        <p:spPr/>
-        <p:txBody>
-          <a:bodyPr/>
-          <a:lstStyle/>
-          <a:p>
-            <a:pPr lvl="0" indent="0" marL="0">
-              <a:spcBef>
-                <a:spcPts val="3000"/>
-              </a:spcBef>
-              <a:buNone/>
-            </a:pPr>
-            <a:r>
-              <a:rPr b="1"/>
-              <a:t>About Marp</a:t>
-            </a:r>
-          </a:p>
-          <a:p>
-            <a:pPr lvl="0" indent="0" marL="0">
-              <a:spcBef>
-                <a:spcPts val="3000"/>
-              </a:spcBef>
-              <a:buNone/>
-            </a:pPr>
-            <a:r>
-              <a:rPr b="1"/>
-              <a:t>公式</a:t>
-            </a:r>
-          </a:p>
-          <a:p>
-            <a:pPr lvl="0"/>
-            <a:r>
-              <a:rPr/>
-              <a:t>Marpit: 基盤ライブラリ：　</a:t>
-            </a:r>
-            <a:r>
-              <a:rPr>
-                <a:hlinkClick r:id="rId2"/>
-              </a:rPr>
-              <a:t>https://marpit.marp.app/</a:t>
-            </a:r>
-          </a:p>
-          <a:p>
-            <a:pPr lvl="0"/>
-            <a:r>
-              <a:rPr/>
-              <a:t>Marp: アプリケーション群：　(https://marp.app/)</a:t>
-            </a:r>
-          </a:p>
-          <a:p>
-            <a:pPr lvl="0" indent="0" marL="0">
-              <a:spcBef>
-                <a:spcPts val="3000"/>
-              </a:spcBef>
-              <a:buNone/>
-            </a:pPr>
-            <a:r>
-              <a:rPr b="1"/>
-              <a:t>VS Code Extension</a:t>
-            </a:r>
-          </a:p>
-          <a:p>
-            <a:pPr lvl="0"/>
-            <a:r>
-              <a:rPr/>
-              <a:t>Marp for VS Code</a:t>
-            </a:r>
-          </a:p>
-          <a:p>
-            <a:pPr lvl="1"/>
-            <a:r>
-              <a:rPr/>
-              <a:t>User setting に theme css ファイル名を指定し、workspaceフォルダに置く</a:t>
-            </a:r>
-          </a:p>
-          <a:p>
-            <a:pPr lvl="0" indent="0" marL="0">
-              <a:spcBef>
-                <a:spcPts val="3000"/>
-              </a:spcBef>
-              <a:buNone/>
-            </a:pPr>
-            <a:r>
-              <a:rPr b="1"/>
-              <a:t>テンプレート・サンプル</a:t>
-            </a:r>
-          </a:p>
-          <a:p>
-            <a:pPr lvl="0"/>
-            <a:r>
-              <a:rPr/>
-              <a:t>https://qiita.com/tomo_makes/items/aafae4021986553ae1d8</a:t>
-            </a:r>
-          </a:p>
-          <a:p>
-            <a:pPr lvl="0"/>
-            <a:r>
-              <a:rPr/>
-              <a:t>https://qiita.com/zono_0/items/e6ab64f381440578ea1c</a:t>
-            </a:r>
-          </a:p>
+      <p:grpSpPr/>
+      <p:sp>
+        <p:nvSpPr>
+          <p:cNvPr id="2" name="Title 1"/>
+          <p:cNvSpPr>
+            <a:spLocks noGrp="1"/>
+          </p:cNvSpPr>
+          <p:nvPr>
+            <p:ph type="title"/>
+          </p:nvPr>
+        </p:nvSpPr>
+        <p:spPr/>
+        <p:txBody>
+          <a:bodyPr/>
+          <a:lstStyle/>
+          <a:p>
+            <a:r>
+              <a:t>見出し3</a:t>
+            </a:r>
+          </a:p>
+        </p:txBody>
+      </p:sp>
+      <p:sp>
+        <p:nvSpPr>
+          <p:cNvPr id="3" name="TextBox 2"/>
+          <p:cNvSpPr txBox="1"/>
+          <p:nvPr/>
+        </p:nvSpPr>
+        <p:spPr>
+          <a:xfrm>
+            <a:off x="457200" y="1371600"/>
+            <a:ext cx="8229600" cy="4572000"/>
+          </a:xfrm>
+          <a:prstGeom prst="rect">
+            <a:avLst/>
+          </a:prstGeom>
+          <a:noFill/>
+        </p:spPr>
+        <p:txBody>
+          <a:bodyPr wrap="none">
+            <a:spAutoFit/>
+          </a:bodyPr>
+          <a:lstStyle/>
+          <a:p/>
         </p:txBody>
       </p:sp>
     </p:spTree>
   </p:cSld>
+  <p:clrMapOvr>
+    <a:masterClrMapping/>
+  </p:clrMapOvr>
 </p:sld>
 </file>
 
-<file path=ppt/slides/slide3.xml><?xml version="1.0" encoding="utf-8"?>
-<p:sld xmlns:a="http://schemas.openxmlformats.org/drawingml/2006/main" xmlns:r="http://schemas.openxmlformats.org/officeDocument/2006/relationships" xmlns:p="http://schemas.openxmlformats.org/presentationml/2006/main">
+<file path=ppt/slides/slide11.xml><?xml version="1.0" encoding="utf-8"?>
+<p:sld xmlns:a="http://schemas.openxmlformats.org/drawingml/2006/main" xmlns:p="http://schemas.openxmlformats.org/presentationml/2006/main" xmlns:r="http://schemas.openxmlformats.org/officeDocument/2006/relationships">
   <p:cSld>
     <p:spTree>
       <p:nvGrpSpPr>
@@ -3303,67 +3235,1449 @@
         <p:cNvGrpSpPr/>
         <p:nvPr/>
       </p:nvGrpSpPr>
-      <p:grpSpPr>
-        <a:xfrm>
-          <a:off x="0" y="0"/>
-          <a:ext cx="0" cy="0"/>
-          <a:chOff x="0" y="0"/>
-          <a:chExt cx="0" cy="0"/>
-        </a:xfrm>
-      </p:grpSpPr>
-      <p:sp>
-        <p:nvSpPr>
-          <p:cNvPr id="4" name="Text Placeholder 3"/>
-          <p:cNvSpPr>
-            <a:spLocks noGrp="1"/>
-          </p:cNvSpPr>
-          <p:nvPr>
-            <p:ph idx="2" sz="half" type="body"/>
-          </p:nvPr>
-        </p:nvSpPr>
-        <p:spPr/>
-        <p:txBody>
-          <a:bodyPr/>
-          <a:lstStyle/>
-          <a:p>
-            <a:pPr lvl="0" indent="0" marL="0">
-              <a:spcBef>
-                <a:spcPts val="3000"/>
-              </a:spcBef>
-              <a:buNone/>
-            </a:pPr>
-            <a:r>
-              <a:rPr b="1"/>
+      <p:grpSpPr/>
+      <p:sp>
+        <p:nvSpPr>
+          <p:cNvPr id="2" name="Title 1"/>
+          <p:cNvSpPr>
+            <a:spLocks noGrp="1"/>
+          </p:cNvSpPr>
+          <p:nvPr>
+            <p:ph type="title"/>
+          </p:nvPr>
+        </p:nvSpPr>
+        <p:spPr/>
+        <p:txBody>
+          <a:bodyPr/>
+          <a:lstStyle/>
+          <a:p>
+            <a:r>
+              <a:t>見出し4</a:t>
+            </a:r>
+          </a:p>
+        </p:txBody>
+      </p:sp>
+      <p:sp>
+        <p:nvSpPr>
+          <p:cNvPr id="3" name="TextBox 2"/>
+          <p:cNvSpPr txBox="1"/>
+          <p:nvPr/>
+        </p:nvSpPr>
+        <p:spPr>
+          <a:xfrm>
+            <a:off x="457200" y="1371600"/>
+            <a:ext cx="8229600" cy="4572000"/>
+          </a:xfrm>
+          <a:prstGeom prst="rect">
+            <a:avLst/>
+          </a:prstGeom>
+          <a:noFill/>
+        </p:spPr>
+        <p:txBody>
+          <a:bodyPr wrap="none">
+            <a:spAutoFit/>
+          </a:bodyPr>
+          <a:lstStyle/>
+          <a:p/>
+          <a:p>
+            <a:pPr/>
+            <a:r>
+              <a:t>**定例会議:** 毎週月曜日 10:00-10:30</a:t>
+            </a:r>
+          </a:p>
+          <a:p>
+            <a:pPr/>
+            <a:r>
+              <a:t>**連絡ツール:** Slack, Google Meet</a:t>
+            </a:r>
+          </a:p>
+          <a:p>
+            <a:pPr/>
+            <a:r>
+              <a:t>その他</a:t>
+            </a:r>
+          </a:p>
+        </p:txBody>
+      </p:sp>
+    </p:spTree>
+  </p:cSld>
+  <p:clrMapOvr>
+    <a:masterClrMapping/>
+  </p:clrMapOvr>
+</p:sld>
+</file>
+
+<file path=ppt/slides/slide12.xml><?xml version="1.0" encoding="utf-8"?>
+<p:sld xmlns:a="http://schemas.openxmlformats.org/drawingml/2006/main" xmlns:p="http://schemas.openxmlformats.org/presentationml/2006/main" xmlns:r="http://schemas.openxmlformats.org/officeDocument/2006/relationships">
+  <p:cSld>
+    <p:spTree>
+      <p:nvGrpSpPr>
+        <p:cNvPr id="1" name=""/>
+        <p:cNvGrpSpPr/>
+        <p:nvPr/>
+      </p:nvGrpSpPr>
+      <p:grpSpPr/>
+      <p:sp>
+        <p:nvSpPr>
+          <p:cNvPr id="2" name="Title 1"/>
+          <p:cNvSpPr>
+            <a:spLocks noGrp="1"/>
+          </p:cNvSpPr>
+          <p:nvPr>
+            <p:ph type="title"/>
+          </p:nvPr>
+        </p:nvSpPr>
+        <p:spPr/>
+        <p:txBody>
+          <a:bodyPr/>
+          <a:lstStyle/>
+          <a:p>
+            <a:r>
+              <a:t>Design Guideline</a:t>
+            </a:r>
+          </a:p>
+        </p:txBody>
+      </p:sp>
+      <p:sp>
+        <p:nvSpPr>
+          <p:cNvPr id="3" name="TextBox 2"/>
+          <p:cNvSpPr txBox="1"/>
+          <p:nvPr/>
+        </p:nvSpPr>
+        <p:spPr>
+          <a:xfrm>
+            <a:off x="457200" y="1371600"/>
+            <a:ext cx="8229600" cy="4572000"/>
+          </a:xfrm>
+          <a:prstGeom prst="rect">
+            <a:avLst/>
+          </a:prstGeom>
+          <a:noFill/>
+        </p:spPr>
+        <p:txBody>
+          <a:bodyPr wrap="none">
+            <a:spAutoFit/>
+          </a:bodyPr>
+          <a:lstStyle/>
+          <a:p/>
+        </p:txBody>
+      </p:sp>
+    </p:spTree>
+  </p:cSld>
+  <p:clrMapOvr>
+    <a:masterClrMapping/>
+  </p:clrMapOvr>
+</p:sld>
+</file>
+
+<file path=ppt/slides/slide13.xml><?xml version="1.0" encoding="utf-8"?>
+<p:sld xmlns:a="http://schemas.openxmlformats.org/drawingml/2006/main" xmlns:p="http://schemas.openxmlformats.org/presentationml/2006/main" xmlns:r="http://schemas.openxmlformats.org/officeDocument/2006/relationships">
+  <p:cSld>
+    <p:spTree>
+      <p:nvGrpSpPr>
+        <p:cNvPr id="1" name=""/>
+        <p:cNvGrpSpPr/>
+        <p:nvPr/>
+      </p:nvGrpSpPr>
+      <p:grpSpPr/>
+      <p:sp>
+        <p:nvSpPr>
+          <p:cNvPr id="2" name="Title 1"/>
+          <p:cNvSpPr>
+            <a:spLocks noGrp="1"/>
+          </p:cNvSpPr>
+          <p:nvPr>
+            <p:ph type="title"/>
+          </p:nvPr>
+        </p:nvSpPr>
+        <p:spPr/>
+        <p:txBody>
+          <a:bodyPr/>
+          <a:lstStyle/>
+          <a:p>
+            <a:r>
+              <a:t>このテンプレートを美しく保つためのルール</a:t>
+            </a:r>
+          </a:p>
+        </p:txBody>
+      </p:sp>
+      <p:sp>
+        <p:nvSpPr>
+          <p:cNvPr id="3" name="TextBox 2"/>
+          <p:cNvSpPr txBox="1"/>
+          <p:nvPr/>
+        </p:nvSpPr>
+        <p:spPr>
+          <a:xfrm>
+            <a:off x="457200" y="1371600"/>
+            <a:ext cx="8229600" cy="4572000"/>
+          </a:xfrm>
+          <a:prstGeom prst="rect">
+            <a:avLst/>
+          </a:prstGeom>
+          <a:noFill/>
+        </p:spPr>
+        <p:txBody>
+          <a:bodyPr wrap="none">
+            <a:spAutoFit/>
+          </a:bodyPr>
+          <a:lstStyle/>
+          <a:p/>
+        </p:txBody>
+      </p:sp>
+    </p:spTree>
+  </p:cSld>
+  <p:clrMapOvr>
+    <a:masterClrMapping/>
+  </p:clrMapOvr>
+</p:sld>
+</file>
+
+<file path=ppt/slides/slide14.xml><?xml version="1.0" encoding="utf-8"?>
+<p:sld xmlns:a="http://schemas.openxmlformats.org/drawingml/2006/main" xmlns:p="http://schemas.openxmlformats.org/presentationml/2006/main" xmlns:r="http://schemas.openxmlformats.org/officeDocument/2006/relationships">
+  <p:cSld>
+    <p:spTree>
+      <p:nvGrpSpPr>
+        <p:cNvPr id="1" name=""/>
+        <p:cNvGrpSpPr/>
+        <p:nvPr/>
+      </p:nvGrpSpPr>
+      <p:grpSpPr/>
+      <p:sp>
+        <p:nvSpPr>
+          <p:cNvPr id="2" name="Title 1"/>
+          <p:cNvSpPr>
+            <a:spLocks noGrp="1"/>
+          </p:cNvSpPr>
+          <p:nvPr>
+            <p:ph type="title"/>
+          </p:nvPr>
+        </p:nvSpPr>
+        <p:spPr/>
+        <p:txBody>
+          <a:bodyPr/>
+          <a:lstStyle/>
+          <a:p>
+            <a:r>
+              <a:t>スライドタイトル (`##`) のルール</a:t>
+            </a:r>
+          </a:p>
+        </p:txBody>
+      </p:sp>
+      <p:sp>
+        <p:nvSpPr>
+          <p:cNvPr id="3" name="TextBox 2"/>
+          <p:cNvSpPr txBox="1"/>
+          <p:nvPr/>
+        </p:nvSpPr>
+        <p:spPr>
+          <a:xfrm>
+            <a:off x="457200" y="1371600"/>
+            <a:ext cx="8229600" cy="4572000"/>
+          </a:xfrm>
+          <a:prstGeom prst="rect">
+            <a:avLst/>
+          </a:prstGeom>
+          <a:noFill/>
+        </p:spPr>
+        <p:txBody>
+          <a:bodyPr wrap="none">
+            <a:spAutoFit/>
+          </a:bodyPr>
+          <a:lstStyle/>
+          <a:p/>
+        </p:txBody>
+      </p:sp>
+    </p:spTree>
+  </p:cSld>
+  <p:clrMapOvr>
+    <a:masterClrMapping/>
+  </p:clrMapOvr>
+</p:sld>
+</file>
+
+<file path=ppt/slides/slide15.xml><?xml version="1.0" encoding="utf-8"?>
+<p:sld xmlns:a="http://schemas.openxmlformats.org/drawingml/2006/main" xmlns:p="http://schemas.openxmlformats.org/presentationml/2006/main" xmlns:r="http://schemas.openxmlformats.org/officeDocument/2006/relationships">
+  <p:cSld>
+    <p:spTree>
+      <p:nvGrpSpPr>
+        <p:cNvPr id="1" name=""/>
+        <p:cNvGrpSpPr/>
+        <p:nvPr/>
+      </p:nvGrpSpPr>
+      <p:grpSpPr/>
+      <p:sp>
+        <p:nvSpPr>
+          <p:cNvPr id="2" name="Title 1"/>
+          <p:cNvSpPr>
+            <a:spLocks noGrp="1"/>
+          </p:cNvSpPr>
+          <p:nvPr>
+            <p:ph type="title"/>
+          </p:nvPr>
+        </p:nvSpPr>
+        <p:spPr/>
+        <p:txBody>
+          <a:bodyPr/>
+          <a:lstStyle/>
+          <a:p>
+            <a:r>
+              <a:t>**原則: 必ず1行に収めること**</a:t>
+            </a:r>
+          </a:p>
+        </p:txBody>
+      </p:sp>
+      <p:sp>
+        <p:nvSpPr>
+          <p:cNvPr id="3" name="TextBox 2"/>
+          <p:cNvSpPr txBox="1"/>
+          <p:nvPr/>
+        </p:nvSpPr>
+        <p:spPr>
+          <a:xfrm>
+            <a:off x="457200" y="1371600"/>
+            <a:ext cx="8229600" cy="4572000"/>
+          </a:xfrm>
+          <a:prstGeom prst="rect">
+            <a:avLst/>
+          </a:prstGeom>
+          <a:noFill/>
+        </p:spPr>
+        <p:txBody>
+          <a:bodyPr wrap="none">
+            <a:spAutoFit/>
+          </a:bodyPr>
+          <a:lstStyle/>
+          <a:p/>
+          <a:p>
+            <a:pPr/>
+            <a:r>
+              <a:t>タイトルが2行になると、後続のコンテンツと重なり、レイアウトが完全に崩れてしまいます。これは最も重要なルールです。</a:t>
+            </a:r>
+          </a:p>
+        </p:txBody>
+      </p:sp>
+    </p:spTree>
+  </p:cSld>
+  <p:clrMapOvr>
+    <a:masterClrMapping/>
+  </p:clrMapOvr>
+</p:sld>
+</file>
+
+<file path=ppt/slides/slide16.xml><?xml version="1.0" encoding="utf-8"?>
+<p:sld xmlns:a="http://schemas.openxmlformats.org/drawingml/2006/main" xmlns:p="http://schemas.openxmlformats.org/presentationml/2006/main" xmlns:r="http://schemas.openxmlformats.org/officeDocument/2006/relationships">
+  <p:cSld>
+    <p:spTree>
+      <p:nvGrpSpPr>
+        <p:cNvPr id="1" name=""/>
+        <p:cNvGrpSpPr/>
+        <p:nvPr/>
+      </p:nvGrpSpPr>
+      <p:grpSpPr/>
+      <p:sp>
+        <p:nvSpPr>
+          <p:cNvPr id="2" name="Title 1"/>
+          <p:cNvSpPr>
+            <a:spLocks noGrp="1"/>
+          </p:cNvSpPr>
+          <p:nvPr>
+            <p:ph type="title"/>
+          </p:nvPr>
+        </p:nvSpPr>
+        <p:spPr/>
+        <p:txBody>
+          <a:bodyPr/>
+          <a:lstStyle/>
+          <a:p>
+            <a:r>
+              <a:t>**目安: 全角30文字以内**</a:t>
+            </a:r>
+          </a:p>
+        </p:txBody>
+      </p:sp>
+      <p:sp>
+        <p:nvSpPr>
+          <p:cNvPr id="3" name="TextBox 2"/>
+          <p:cNvSpPr txBox="1"/>
+          <p:nvPr/>
+        </p:nvSpPr>
+        <p:spPr>
+          <a:xfrm>
+            <a:off x="457200" y="1371600"/>
+            <a:ext cx="8229600" cy="4572000"/>
+          </a:xfrm>
+          <a:prstGeom prst="rect">
+            <a:avLst/>
+          </a:prstGeom>
+          <a:noFill/>
+        </p:spPr>
+        <p:txBody>
+          <a:bodyPr wrap="none">
+            <a:spAutoFit/>
+          </a:bodyPr>
+          <a:lstStyle/>
+          <a:p/>
+          <a:p>
+            <a:pPr/>
+            <a:r>
+              <a:t>簡潔で分かりやすいタイトルを心がけてください。</a:t>
+            </a:r>
+          </a:p>
+        </p:txBody>
+      </p:sp>
+    </p:spTree>
+  </p:cSld>
+  <p:clrMapOvr>
+    <a:masterClrMapping/>
+  </p:clrMapOvr>
+</p:sld>
+</file>
+
+<file path=ppt/slides/slide17.xml><?xml version="1.0" encoding="utf-8"?>
+<p:sld xmlns:a="http://schemas.openxmlformats.org/drawingml/2006/main" xmlns:p="http://schemas.openxmlformats.org/presentationml/2006/main" xmlns:r="http://schemas.openxmlformats.org/officeDocument/2006/relationships">
+  <p:cSld>
+    <p:spTree>
+      <p:nvGrpSpPr>
+        <p:cNvPr id="1" name=""/>
+        <p:cNvGrpSpPr/>
+        <p:nvPr/>
+      </p:nvGrpSpPr>
+      <p:grpSpPr/>
+      <p:sp>
+        <p:nvSpPr>
+          <p:cNvPr id="2" name="Title 1"/>
+          <p:cNvSpPr>
+            <a:spLocks noGrp="1"/>
+          </p:cNvSpPr>
+          <p:nvPr>
+            <p:ph type="title"/>
+          </p:nvPr>
+        </p:nvSpPr>
+        <p:spPr/>
+        <p:txBody>
+          <a:bodyPr/>
+          <a:lstStyle/>
+          <a:p>
+            <a:r>
+              <a:t>&lt;span class="bad-example"&gt;悪い例 (Bad) &lt;/span&gt;</a:t>
+            </a:r>
+          </a:p>
+        </p:txBody>
+      </p:sp>
+      <p:sp>
+        <p:nvSpPr>
+          <p:cNvPr id="3" name="TextBox 2"/>
+          <p:cNvSpPr txBox="1"/>
+          <p:nvPr/>
+        </p:nvSpPr>
+        <p:spPr>
+          <a:xfrm>
+            <a:off x="457200" y="1371600"/>
+            <a:ext cx="8229600" cy="4572000"/>
+          </a:xfrm>
+          <a:prstGeom prst="rect">
+            <a:avLst/>
+          </a:prstGeom>
+          <a:noFill/>
+        </p:spPr>
+        <p:txBody>
+          <a:bodyPr wrap="none">
+            <a:spAutoFit/>
+          </a:bodyPr>
+          <a:lstStyle/>
+          <a:p/>
+          <a:p>
+            <a:pPr/>
+            <a:r>
+              <a:t>`## このプロジェクトにおける非常に重要な技術的負債とその具体的な返済計画に関する長大な考察`</a:t>
+            </a:r>
+            <a:br/>
+            <a:r>
+              <a:t>（長すぎて改行され、レイアウトが崩れます）</a:t>
+            </a:r>
+          </a:p>
+        </p:txBody>
+      </p:sp>
+    </p:spTree>
+  </p:cSld>
+  <p:clrMapOvr>
+    <a:masterClrMapping/>
+  </p:clrMapOvr>
+</p:sld>
+</file>
+
+<file path=ppt/slides/slide18.xml><?xml version="1.0" encoding="utf-8"?>
+<p:sld xmlns:a="http://schemas.openxmlformats.org/drawingml/2006/main" xmlns:p="http://schemas.openxmlformats.org/presentationml/2006/main" xmlns:r="http://schemas.openxmlformats.org/officeDocument/2006/relationships">
+  <p:cSld>
+    <p:spTree>
+      <p:nvGrpSpPr>
+        <p:cNvPr id="1" name=""/>
+        <p:cNvGrpSpPr/>
+        <p:nvPr/>
+      </p:nvGrpSpPr>
+      <p:grpSpPr/>
+      <p:sp>
+        <p:nvSpPr>
+          <p:cNvPr id="2" name="Title 1"/>
+          <p:cNvSpPr>
+            <a:spLocks noGrp="1"/>
+          </p:cNvSpPr>
+          <p:nvPr>
+            <p:ph type="title"/>
+          </p:nvPr>
+        </p:nvSpPr>
+        <p:spPr/>
+        <p:txBody>
+          <a:bodyPr/>
+          <a:lstStyle/>
+          <a:p>
+            <a:r>
+              <a:t>本文・箇条書きのルール</a:t>
+            </a:r>
+          </a:p>
+        </p:txBody>
+      </p:sp>
+      <p:sp>
+        <p:nvSpPr>
+          <p:cNvPr id="3" name="TextBox 2"/>
+          <p:cNvSpPr txBox="1"/>
+          <p:nvPr/>
+        </p:nvSpPr>
+        <p:spPr>
+          <a:xfrm>
+            <a:off x="457200" y="1371600"/>
+            <a:ext cx="8229600" cy="4572000"/>
+          </a:xfrm>
+          <a:prstGeom prst="rect">
+            <a:avLst/>
+          </a:prstGeom>
+          <a:noFill/>
+        </p:spPr>
+        <p:txBody>
+          <a:bodyPr wrap="none">
+            <a:spAutoFit/>
+          </a:bodyPr>
+          <a:lstStyle/>
+          <a:p/>
+        </p:txBody>
+      </p:sp>
+    </p:spTree>
+  </p:cSld>
+  <p:clrMapOvr>
+    <a:masterClrMapping/>
+  </p:clrMapOvr>
+</p:sld>
+</file>
+
+<file path=ppt/slides/slide19.xml><?xml version="1.0" encoding="utf-8"?>
+<p:sld xmlns:a="http://schemas.openxmlformats.org/drawingml/2006/main" xmlns:p="http://schemas.openxmlformats.org/presentationml/2006/main" xmlns:r="http://schemas.openxmlformats.org/officeDocument/2006/relationships">
+  <p:cSld>
+    <p:spTree>
+      <p:nvGrpSpPr>
+        <p:cNvPr id="1" name=""/>
+        <p:cNvGrpSpPr/>
+        <p:nvPr/>
+      </p:nvGrpSpPr>
+      <p:grpSpPr/>
+      <p:sp>
+        <p:nvSpPr>
+          <p:cNvPr id="2" name="Title 1"/>
+          <p:cNvSpPr>
+            <a:spLocks noGrp="1"/>
+          </p:cNvSpPr>
+          <p:nvPr>
+            <p:ph type="title"/>
+          </p:nvPr>
+        </p:nvSpPr>
+        <p:spPr/>
+        <p:txBody>
+          <a:bodyPr/>
+          <a:lstStyle/>
+          <a:p>
+            <a:r>
+              <a:t>**原則: 1スライド・1メッセージ**</a:t>
+            </a:r>
+          </a:p>
+        </p:txBody>
+      </p:sp>
+      <p:sp>
+        <p:nvSpPr>
+          <p:cNvPr id="3" name="TextBox 2"/>
+          <p:cNvSpPr txBox="1"/>
+          <p:nvPr/>
+        </p:nvSpPr>
+        <p:spPr>
+          <a:xfrm>
+            <a:off x="457200" y="1371600"/>
+            <a:ext cx="8229600" cy="4572000"/>
+          </a:xfrm>
+          <a:prstGeom prst="rect">
+            <a:avLst/>
+          </a:prstGeom>
+          <a:noFill/>
+        </p:spPr>
+        <p:txBody>
+          <a:bodyPr wrap="none">
+            <a:spAutoFit/>
+          </a:bodyPr>
+          <a:lstStyle/>
+          <a:p/>
+          <a:p>
+            <a:pPr/>
+            <a:r>
+              <a:t>1枚のスライドに情報を詰め込みすぎず、聞き手が集中できるよう、最も伝えたいメッセージを1つに絞りましょう。</a:t>
+            </a:r>
+          </a:p>
+        </p:txBody>
+      </p:sp>
+    </p:spTree>
+  </p:cSld>
+  <p:clrMapOvr>
+    <a:masterClrMapping/>
+  </p:clrMapOvr>
+</p:sld>
+</file>
+
+<file path=ppt/slides/slide2.xml><?xml version="1.0" encoding="utf-8"?>
+<p:sld xmlns:a="http://schemas.openxmlformats.org/drawingml/2006/main" xmlns:p="http://schemas.openxmlformats.org/presentationml/2006/main" xmlns:r="http://schemas.openxmlformats.org/officeDocument/2006/relationships">
+  <p:cSld>
+    <p:spTree>
+      <p:nvGrpSpPr>
+        <p:cNvPr id="1" name=""/>
+        <p:cNvGrpSpPr/>
+        <p:nvPr/>
+      </p:nvGrpSpPr>
+      <p:grpSpPr/>
+      <p:sp>
+        <p:nvSpPr>
+          <p:cNvPr id="2" name="Title 1"/>
+          <p:cNvSpPr>
+            <a:spLocks noGrp="1"/>
+          </p:cNvSpPr>
+          <p:nvPr>
+            <p:ph type="title"/>
+          </p:nvPr>
+        </p:nvSpPr>
+        <p:spPr/>
+        <p:txBody>
+          <a:bodyPr/>
+          <a:lstStyle/>
+          <a:p>
+            <a:r>
+              <a:t>theme: my-theme</a:t>
+            </a:r>
+          </a:p>
+        </p:txBody>
+      </p:sp>
+      <p:sp>
+        <p:nvSpPr>
+          <p:cNvPr id="3" name="TextBox 2"/>
+          <p:cNvSpPr txBox="1"/>
+          <p:nvPr/>
+        </p:nvSpPr>
+        <p:spPr>
+          <a:xfrm>
+            <a:off x="457200" y="1371600"/>
+            <a:ext cx="8229600" cy="4572000"/>
+          </a:xfrm>
+          <a:prstGeom prst="rect">
+            <a:avLst/>
+          </a:prstGeom>
+          <a:noFill/>
+        </p:spPr>
+        <p:txBody>
+          <a:bodyPr wrap="none">
+            <a:spAutoFit/>
+          </a:bodyPr>
+          <a:lstStyle/>
+          <a:p/>
+        </p:txBody>
+      </p:sp>
+    </p:spTree>
+  </p:cSld>
+  <p:clrMapOvr>
+    <a:masterClrMapping/>
+  </p:clrMapOvr>
+</p:sld>
+</file>
+
+<file path=ppt/slides/slide20.xml><?xml version="1.0" encoding="utf-8"?>
+<p:sld xmlns:a="http://schemas.openxmlformats.org/drawingml/2006/main" xmlns:p="http://schemas.openxmlformats.org/presentationml/2006/main" xmlns:r="http://schemas.openxmlformats.org/officeDocument/2006/relationships">
+  <p:cSld>
+    <p:spTree>
+      <p:nvGrpSpPr>
+        <p:cNvPr id="1" name=""/>
+        <p:cNvGrpSpPr/>
+        <p:nvPr/>
+      </p:nvGrpSpPr>
+      <p:grpSpPr/>
+      <p:sp>
+        <p:nvSpPr>
+          <p:cNvPr id="2" name="Title 1"/>
+          <p:cNvSpPr>
+            <a:spLocks noGrp="1"/>
+          </p:cNvSpPr>
+          <p:nvPr>
+            <p:ph type="title"/>
+          </p:nvPr>
+        </p:nvSpPr>
+        <p:spPr/>
+        <p:txBody>
+          <a:bodyPr/>
+          <a:lstStyle/>
+          <a:p>
+            <a:r>
+              <a:t>**推奨するレイアウトと文字量**</a:t>
+            </a:r>
+          </a:p>
+        </p:txBody>
+      </p:sp>
+      <p:sp>
+        <p:nvSpPr>
+          <p:cNvPr id="3" name="TextBox 2"/>
+          <p:cNvSpPr txBox="1"/>
+          <p:nvPr/>
+        </p:nvSpPr>
+        <p:spPr>
+          <a:xfrm>
+            <a:off x="457200" y="1371600"/>
+            <a:ext cx="8229600" cy="4572000"/>
+          </a:xfrm>
+          <a:prstGeom prst="rect">
+            <a:avLst/>
+          </a:prstGeom>
+          <a:noFill/>
+        </p:spPr>
+        <p:txBody>
+          <a:bodyPr wrap="none">
+            <a:spAutoFit/>
+          </a:bodyPr>
+          <a:lstStyle/>
+          <a:p/>
+          <a:p>
+            <a:pPr/>
+            <a:r>
+              <a:t>**1行あたりの文字数:** **全角35〜45文字**</a:t>
+            </a:r>
+          </a:p>
+          <a:p>
+            <a:pPr/>
+            <a:r>
+              <a:t>これを超えると視線の移動が大きくなり、読みにくくなります。適度な位置で改行を入れましょう。</a:t>
+            </a:r>
+          </a:p>
+          <a:p>
+            <a:pPr/>
+            <a:r>
+              <a:t>**箇条書きの項目数:** **5〜7個**まで</a:t>
+            </a:r>
+          </a:p>
+          <a:p>
+            <a:pPr/>
+            <a:r>
+              <a:t>**各項目の行数:** **1〜2行**が理想</a:t>
+            </a:r>
+          </a:p>
+          <a:p>
+            <a:pPr/>
+            <a:r>
+              <a:t>**文章（パラグラフ）の行数:** **5〜7行**程度まで</a:t>
+            </a:r>
+          </a:p>
+          <a:p>
+            <a:pPr/>
+            <a:r>
+              <a:t>スライドはドキュメントではありません。詳細は口頭で補うか、別途資料を配布しましょう。</a:t>
+            </a:r>
+          </a:p>
+        </p:txBody>
+      </p:sp>
+    </p:spTree>
+  </p:cSld>
+  <p:clrMapOvr>
+    <a:masterClrMapping/>
+  </p:clrMapOvr>
+</p:sld>
+</file>
+
+<file path=ppt/slides/slide21.xml><?xml version="1.0" encoding="utf-8"?>
+<p:sld xmlns:a="http://schemas.openxmlformats.org/drawingml/2006/main" xmlns:p="http://schemas.openxmlformats.org/presentationml/2006/main" xmlns:r="http://schemas.openxmlformats.org/officeDocument/2006/relationships">
+  <p:cSld>
+    <p:spTree>
+      <p:nvGrpSpPr>
+        <p:cNvPr id="1" name=""/>
+        <p:cNvGrpSpPr/>
+        <p:nvPr/>
+      </p:nvGrpSpPr>
+      <p:grpSpPr/>
+      <p:sp>
+        <p:nvSpPr>
+          <p:cNvPr id="2" name="Title 1"/>
+          <p:cNvSpPr>
+            <a:spLocks noGrp="1"/>
+          </p:cNvSpPr>
+          <p:nvPr>
+            <p:ph type="title"/>
+          </p:nvPr>
+        </p:nvSpPr>
+        <p:spPr/>
+        <p:txBody>
+          <a:bodyPr/>
+          <a:lstStyle/>
+          <a:p>
+            <a:r>
+              <a:t>その他の要素のルール</a:t>
+            </a:r>
+          </a:p>
+        </p:txBody>
+      </p:sp>
+      <p:sp>
+        <p:nvSpPr>
+          <p:cNvPr id="3" name="TextBox 2"/>
+          <p:cNvSpPr txBox="1"/>
+          <p:nvPr/>
+        </p:nvSpPr>
+        <p:spPr>
+          <a:xfrm>
+            <a:off x="457200" y="1371600"/>
+            <a:ext cx="8229600" cy="4572000"/>
+          </a:xfrm>
+          <a:prstGeom prst="rect">
+            <a:avLst/>
+          </a:prstGeom>
+          <a:noFill/>
+        </p:spPr>
+        <p:txBody>
+          <a:bodyPr wrap="none">
+            <a:spAutoFit/>
+          </a:bodyPr>
+          <a:lstStyle/>
+          <a:p/>
+        </p:txBody>
+      </p:sp>
+    </p:spTree>
+  </p:cSld>
+  <p:clrMapOvr>
+    <a:masterClrMapping/>
+  </p:clrMapOvr>
+</p:sld>
+</file>
+
+<file path=ppt/slides/slide22.xml><?xml version="1.0" encoding="utf-8"?>
+<p:sld xmlns:a="http://schemas.openxmlformats.org/drawingml/2006/main" xmlns:p="http://schemas.openxmlformats.org/presentationml/2006/main" xmlns:r="http://schemas.openxmlformats.org/officeDocument/2006/relationships">
+  <p:cSld>
+    <p:spTree>
+      <p:nvGrpSpPr>
+        <p:cNvPr id="1" name=""/>
+        <p:cNvGrpSpPr/>
+        <p:nvPr/>
+      </p:nvGrpSpPr>
+      <p:grpSpPr/>
+      <p:sp>
+        <p:nvSpPr>
+          <p:cNvPr id="2" name="Title 1"/>
+          <p:cNvSpPr>
+            <a:spLocks noGrp="1"/>
+          </p:cNvSpPr>
+          <p:nvPr>
+            <p:ph type="title"/>
+          </p:nvPr>
+        </p:nvSpPr>
+        <p:spPr/>
+        <p:txBody>
+          <a:bodyPr/>
+          <a:lstStyle/>
+          <a:p>
+            <a:r>
+              <a:t>見出し3 (`###`)</a:t>
+            </a:r>
+          </a:p>
+        </p:txBody>
+      </p:sp>
+      <p:sp>
+        <p:nvSpPr>
+          <p:cNvPr id="3" name="TextBox 2"/>
+          <p:cNvSpPr txBox="1"/>
+          <p:nvPr/>
+        </p:nvSpPr>
+        <p:spPr>
+          <a:xfrm>
+            <a:off x="457200" y="1371600"/>
+            <a:ext cx="8229600" cy="4572000"/>
+          </a:xfrm>
+          <a:prstGeom prst="rect">
+            <a:avLst/>
+          </a:prstGeom>
+          <a:noFill/>
+        </p:spPr>
+        <p:txBody>
+          <a:bodyPr wrap="none">
+            <a:spAutoFit/>
+          </a:bodyPr>
+          <a:lstStyle/>
+          <a:p/>
+          <a:p>
+            <a:pPr/>
+            <a:r>
+              <a:t>サブタイトルや小見出しとして使用します。</a:t>
+            </a:r>
+          </a:p>
+          <a:p>
+            <a:pPr/>
+            <a:r>
+              <a:t>**目安:** 全角15文字以内</a:t>
+            </a:r>
+          </a:p>
+          <a:p>
+            <a:pPr/>
+            <a:r>
+              <a:t>**役割:** これから話す内容を簡潔に示します。</a:t>
+            </a:r>
+          </a:p>
+        </p:txBody>
+      </p:sp>
+    </p:spTree>
+  </p:cSld>
+  <p:clrMapOvr>
+    <a:masterClrMapping/>
+  </p:clrMapOvr>
+</p:sld>
+</file>
+
+<file path=ppt/slides/slide23.xml><?xml version="1.0" encoding="utf-8"?>
+<p:sld xmlns:a="http://schemas.openxmlformats.org/drawingml/2006/main" xmlns:p="http://schemas.openxmlformats.org/presentationml/2006/main" xmlns:r="http://schemas.openxmlformats.org/officeDocument/2006/relationships">
+  <p:cSld>
+    <p:spTree>
+      <p:nvGrpSpPr>
+        <p:cNvPr id="1" name=""/>
+        <p:cNvGrpSpPr/>
+        <p:nvPr/>
+      </p:nvGrpSpPr>
+      <p:grpSpPr/>
+      <p:sp>
+        <p:nvSpPr>
+          <p:cNvPr id="2" name="Title 1"/>
+          <p:cNvSpPr>
+            <a:spLocks noGrp="1"/>
+          </p:cNvSpPr>
+          <p:nvPr>
+            <p:ph type="title"/>
+          </p:nvPr>
+        </p:nvSpPr>
+        <p:spPr/>
+        <p:txBody>
+          <a:bodyPr/>
+          <a:lstStyle/>
+          <a:p>
+            <a:r>
+              <a:t>テーブル (`| |`)</a:t>
+            </a:r>
+          </a:p>
+        </p:txBody>
+      </p:sp>
+      <p:sp>
+        <p:nvSpPr>
+          <p:cNvPr id="3" name="TextBox 2"/>
+          <p:cNvSpPr txBox="1"/>
+          <p:nvPr/>
+        </p:nvSpPr>
+        <p:spPr>
+          <a:xfrm>
+            <a:off x="457200" y="1371600"/>
+            <a:ext cx="8229600" cy="4572000"/>
+          </a:xfrm>
+          <a:prstGeom prst="rect">
+            <a:avLst/>
+          </a:prstGeom>
+          <a:noFill/>
+        </p:spPr>
+        <p:txBody>
+          <a:bodyPr wrap="none">
+            <a:spAutoFit/>
+          </a:bodyPr>
+          <a:lstStyle/>
+          <a:p/>
+          <a:p>
+            <a:pPr/>
+            <a:r>
+              <a:t>情報を整理して見せる際に有効ですが、複雑になりすぎないように注意が必要です。</a:t>
+            </a:r>
+          </a:p>
+          <a:p>
+            <a:pPr/>
+            <a:r>
+              <a:t>**推奨カラム（列）数:** **3〜4列**まで</a:t>
+            </a:r>
+          </a:p>
+          <a:p>
+            <a:pPr/>
+            <a:r>
+              <a:t>**セル内のテキスト:** 可能な限り簡潔に。長いテキストは箇条書きにするなど、表現を工夫しましょう。</a:t>
+            </a:r>
+          </a:p>
+        </p:txBody>
+      </p:sp>
+    </p:spTree>
+  </p:cSld>
+  <p:clrMapOvr>
+    <a:masterClrMapping/>
+  </p:clrMapOvr>
+</p:sld>
+</file>
+
+<file path=ppt/slides/slide3.xml><?xml version="1.0" encoding="utf-8"?>
+<p:sld xmlns:a="http://schemas.openxmlformats.org/drawingml/2006/main" xmlns:p="http://schemas.openxmlformats.org/presentationml/2006/main" xmlns:r="http://schemas.openxmlformats.org/officeDocument/2006/relationships">
+  <p:cSld>
+    <p:spTree>
+      <p:nvGrpSpPr>
+        <p:cNvPr id="1" name=""/>
+        <p:cNvGrpSpPr/>
+        <p:nvPr/>
+      </p:nvGrpSpPr>
+      <p:grpSpPr/>
+      <p:sp>
+        <p:nvSpPr>
+          <p:cNvPr id="2" name="Title 1"/>
+          <p:cNvSpPr>
+            <a:spLocks noGrp="1"/>
+          </p:cNvSpPr>
+          <p:nvPr>
+            <p:ph type="title"/>
+          </p:nvPr>
+        </p:nvSpPr>
+        <p:spPr/>
+        <p:txBody>
+          <a:bodyPr/>
+          <a:lstStyle/>
+          <a:p>
+            <a:r>
+              <a:t>About Marp</a:t>
+            </a:r>
+          </a:p>
+        </p:txBody>
+      </p:sp>
+      <p:sp>
+        <p:nvSpPr>
+          <p:cNvPr id="3" name="TextBox 2"/>
+          <p:cNvSpPr txBox="1"/>
+          <p:nvPr/>
+        </p:nvSpPr>
+        <p:spPr>
+          <a:xfrm>
+            <a:off x="457200" y="1371600"/>
+            <a:ext cx="8229600" cy="4572000"/>
+          </a:xfrm>
+          <a:prstGeom prst="rect">
+            <a:avLst/>
+          </a:prstGeom>
+          <a:noFill/>
+        </p:spPr>
+        <p:txBody>
+          <a:bodyPr wrap="none">
+            <a:spAutoFit/>
+          </a:bodyPr>
+          <a:lstStyle/>
+          <a:p/>
+        </p:txBody>
+      </p:sp>
+    </p:spTree>
+  </p:cSld>
+  <p:clrMapOvr>
+    <a:masterClrMapping/>
+  </p:clrMapOvr>
+</p:sld>
+</file>
+
+<file path=ppt/slides/slide4.xml><?xml version="1.0" encoding="utf-8"?>
+<p:sld xmlns:a="http://schemas.openxmlformats.org/drawingml/2006/main" xmlns:p="http://schemas.openxmlformats.org/presentationml/2006/main" xmlns:r="http://schemas.openxmlformats.org/officeDocument/2006/relationships">
+  <p:cSld>
+    <p:spTree>
+      <p:nvGrpSpPr>
+        <p:cNvPr id="1" name=""/>
+        <p:cNvGrpSpPr/>
+        <p:nvPr/>
+      </p:nvGrpSpPr>
+      <p:grpSpPr/>
+      <p:sp>
+        <p:nvSpPr>
+          <p:cNvPr id="2" name="Title 1"/>
+          <p:cNvSpPr>
+            <a:spLocks noGrp="1"/>
+          </p:cNvSpPr>
+          <p:nvPr>
+            <p:ph type="title"/>
+          </p:nvPr>
+        </p:nvSpPr>
+        <p:spPr/>
+        <p:txBody>
+          <a:bodyPr/>
+          <a:lstStyle/>
+          <a:p>
+            <a:r>
+              <a:t>公式</a:t>
+            </a:r>
+          </a:p>
+        </p:txBody>
+      </p:sp>
+      <p:sp>
+        <p:nvSpPr>
+          <p:cNvPr id="3" name="TextBox 2"/>
+          <p:cNvSpPr txBox="1"/>
+          <p:nvPr/>
+        </p:nvSpPr>
+        <p:spPr>
+          <a:xfrm>
+            <a:off x="457200" y="1371600"/>
+            <a:ext cx="8229600" cy="4572000"/>
+          </a:xfrm>
+          <a:prstGeom prst="rect">
+            <a:avLst/>
+          </a:prstGeom>
+          <a:noFill/>
+        </p:spPr>
+        <p:txBody>
+          <a:bodyPr wrap="none">
+            <a:spAutoFit/>
+          </a:bodyPr>
+          <a:lstStyle/>
+          <a:p/>
+          <a:p>
+            <a:pPr/>
+            <a:r>
+              <a:t>Marpit: 基盤ライブラリ：　[https://marpit.marp.app/](https://marpit.marp.app/)</a:t>
+            </a:r>
+          </a:p>
+          <a:p>
+            <a:pPr/>
+            <a:r>
+              <a:t>Marp: アプリケーション群：　(https://marp.app/)</a:t>
+            </a:r>
+          </a:p>
+        </p:txBody>
+      </p:sp>
+    </p:spTree>
+  </p:cSld>
+  <p:clrMapOvr>
+    <a:masterClrMapping/>
+  </p:clrMapOvr>
+</p:sld>
+</file>
+
+<file path=ppt/slides/slide5.xml><?xml version="1.0" encoding="utf-8"?>
+<p:sld xmlns:a="http://schemas.openxmlformats.org/drawingml/2006/main" xmlns:p="http://schemas.openxmlformats.org/presentationml/2006/main" xmlns:r="http://schemas.openxmlformats.org/officeDocument/2006/relationships">
+  <p:cSld>
+    <p:spTree>
+      <p:nvGrpSpPr>
+        <p:cNvPr id="1" name=""/>
+        <p:cNvGrpSpPr/>
+        <p:nvPr/>
+      </p:nvGrpSpPr>
+      <p:grpSpPr/>
+      <p:sp>
+        <p:nvSpPr>
+          <p:cNvPr id="2" name="Title 1"/>
+          <p:cNvSpPr>
+            <a:spLocks noGrp="1"/>
+          </p:cNvSpPr>
+          <p:nvPr>
+            <p:ph type="title"/>
+          </p:nvPr>
+        </p:nvSpPr>
+        <p:spPr/>
+        <p:txBody>
+          <a:bodyPr/>
+          <a:lstStyle/>
+          <a:p>
+            <a:r>
+              <a:t>VS Code Extension</a:t>
+            </a:r>
+          </a:p>
+        </p:txBody>
+      </p:sp>
+      <p:sp>
+        <p:nvSpPr>
+          <p:cNvPr id="3" name="TextBox 2"/>
+          <p:cNvSpPr txBox="1"/>
+          <p:nvPr/>
+        </p:nvSpPr>
+        <p:spPr>
+          <a:xfrm>
+            <a:off x="457200" y="1371600"/>
+            <a:ext cx="8229600" cy="4572000"/>
+          </a:xfrm>
+          <a:prstGeom prst="rect">
+            <a:avLst/>
+          </a:prstGeom>
+          <a:noFill/>
+        </p:spPr>
+        <p:txBody>
+          <a:bodyPr wrap="none">
+            <a:spAutoFit/>
+          </a:bodyPr>
+          <a:lstStyle/>
+          <a:p/>
+          <a:p>
+            <a:pPr/>
+            <a:r>
+              <a:t>Marp for VS Code</a:t>
+            </a:r>
+          </a:p>
+          <a:p>
+            <a:pPr/>
+            <a:r>
+              <a:t>User setting に theme css ファイル名を指定し、workspaceフォルダに置く</a:t>
+            </a:r>
+          </a:p>
+        </p:txBody>
+      </p:sp>
+    </p:spTree>
+  </p:cSld>
+  <p:clrMapOvr>
+    <a:masterClrMapping/>
+  </p:clrMapOvr>
+</p:sld>
+</file>
+
+<file path=ppt/slides/slide6.xml><?xml version="1.0" encoding="utf-8"?>
+<p:sld xmlns:a="http://schemas.openxmlformats.org/drawingml/2006/main" xmlns:p="http://schemas.openxmlformats.org/presentationml/2006/main" xmlns:r="http://schemas.openxmlformats.org/officeDocument/2006/relationships">
+  <p:cSld>
+    <p:spTree>
+      <p:nvGrpSpPr>
+        <p:cNvPr id="1" name=""/>
+        <p:cNvGrpSpPr/>
+        <p:nvPr/>
+      </p:nvGrpSpPr>
+      <p:grpSpPr/>
+      <p:sp>
+        <p:nvSpPr>
+          <p:cNvPr id="2" name="Title 1"/>
+          <p:cNvSpPr>
+            <a:spLocks noGrp="1"/>
+          </p:cNvSpPr>
+          <p:nvPr>
+            <p:ph type="title"/>
+          </p:nvPr>
+        </p:nvSpPr>
+        <p:spPr/>
+        <p:txBody>
+          <a:bodyPr/>
+          <a:lstStyle/>
+          <a:p>
+            <a:r>
+              <a:t>テンプレート・サンプル</a:t>
+            </a:r>
+          </a:p>
+        </p:txBody>
+      </p:sp>
+      <p:sp>
+        <p:nvSpPr>
+          <p:cNvPr id="3" name="TextBox 2"/>
+          <p:cNvSpPr txBox="1"/>
+          <p:nvPr/>
+        </p:nvSpPr>
+        <p:spPr>
+          <a:xfrm>
+            <a:off x="457200" y="1371600"/>
+            <a:ext cx="8229600" cy="4572000"/>
+          </a:xfrm>
+          <a:prstGeom prst="rect">
+            <a:avLst/>
+          </a:prstGeom>
+          <a:noFill/>
+        </p:spPr>
+        <p:txBody>
+          <a:bodyPr wrap="none">
+            <a:spAutoFit/>
+          </a:bodyPr>
+          <a:lstStyle/>
+          <a:p/>
+          <a:p>
+            <a:pPr/>
+            <a:r>
+              <a:t>https://qiita.com/tomo_makes/items/aafae4021986553ae1d8</a:t>
+            </a:r>
+          </a:p>
+          <a:p>
+            <a:pPr/>
+            <a:r>
+              <a:t>https://qiita.com/zono_0/items/e6ab64f381440578ea1c</a:t>
+            </a:r>
+          </a:p>
+        </p:txBody>
+      </p:sp>
+    </p:spTree>
+  </p:cSld>
+  <p:clrMapOvr>
+    <a:masterClrMapping/>
+  </p:clrMapOvr>
+</p:sld>
+</file>
+
+<file path=ppt/slides/slide7.xml><?xml version="1.0" encoding="utf-8"?>
+<p:sld xmlns:a="http://schemas.openxmlformats.org/drawingml/2006/main" xmlns:p="http://schemas.openxmlformats.org/presentationml/2006/main" xmlns:r="http://schemas.openxmlformats.org/officeDocument/2006/relationships">
+  <p:cSld>
+    <p:spTree>
+      <p:nvGrpSpPr>
+        <p:cNvPr id="1" name=""/>
+        <p:cNvGrpSpPr/>
+        <p:nvPr/>
+      </p:nvGrpSpPr>
+      <p:grpSpPr/>
+      <p:sp>
+        <p:nvSpPr>
+          <p:cNvPr id="2" name="Title 1"/>
+          <p:cNvSpPr>
+            <a:spLocks noGrp="1"/>
+          </p:cNvSpPr>
+          <p:nvPr>
+            <p:ph type="title"/>
+          </p:nvPr>
+        </p:nvSpPr>
+        <p:spPr/>
+        <p:txBody>
+          <a:bodyPr/>
+          <a:lstStyle/>
+          <a:p>
+            <a:r>
               <a:t>テーブル・見出し・箇条書き</a:t>
             </a:r>
           </a:p>
-          <a:p>
-            <a:pPr lvl="0" indent="0" marL="0">
-              <a:spcBef>
-                <a:spcPts val="3000"/>
-              </a:spcBef>
-              <a:buNone/>
-            </a:pPr>
-            <a:r>
-              <a:rPr b="1"/>
+        </p:txBody>
+      </p:sp>
+      <p:sp>
+        <p:nvSpPr>
+          <p:cNvPr id="3" name="TextBox 2"/>
+          <p:cNvSpPr txBox="1"/>
+          <p:nvPr/>
+        </p:nvSpPr>
+        <p:spPr>
+          <a:xfrm>
+            <a:off x="457200" y="1371600"/>
+            <a:ext cx="8229600" cy="4572000"/>
+          </a:xfrm>
+          <a:prstGeom prst="rect">
+            <a:avLst/>
+          </a:prstGeom>
+          <a:noFill/>
+        </p:spPr>
+        <p:txBody>
+          <a:bodyPr wrap="none">
+            <a:spAutoFit/>
+          </a:bodyPr>
+          <a:lstStyle/>
+          <a:p/>
+        </p:txBody>
+      </p:sp>
+    </p:spTree>
+  </p:cSld>
+  <p:clrMapOvr>
+    <a:masterClrMapping/>
+  </p:clrMapOvr>
+</p:sld>
+</file>
+
+<file path=ppt/slides/slide8.xml><?xml version="1.0" encoding="utf-8"?>
+<p:sld xmlns:a="http://schemas.openxmlformats.org/drawingml/2006/main" xmlns:p="http://schemas.openxmlformats.org/presentationml/2006/main" xmlns:r="http://schemas.openxmlformats.org/officeDocument/2006/relationships">
+  <p:cSld>
+    <p:spTree>
+      <p:nvGrpSpPr>
+        <p:cNvPr id="1" name=""/>
+        <p:cNvGrpSpPr/>
+        <p:nvPr/>
+      </p:nvGrpSpPr>
+      <p:grpSpPr/>
+      <p:sp>
+        <p:nvSpPr>
+          <p:cNvPr id="2" name="Title 1"/>
+          <p:cNvSpPr>
+            <a:spLocks noGrp="1"/>
+          </p:cNvSpPr>
+          <p:nvPr>
+            <p:ph type="title"/>
+          </p:nvPr>
+        </p:nvSpPr>
+        <p:spPr/>
+        <p:txBody>
+          <a:bodyPr/>
+          <a:lstStyle/>
+          <a:p>
+            <a:r>
               <a:t>体制図</a:t>
             </a:r>
           </a:p>
+        </p:txBody>
+      </p:sp>
+      <p:sp>
+        <p:nvSpPr>
+          <p:cNvPr id="3" name="TextBox 2"/>
+          <p:cNvSpPr txBox="1"/>
+          <p:nvPr/>
+        </p:nvSpPr>
+        <p:spPr>
+          <a:xfrm>
+            <a:off x="457200" y="1371600"/>
+            <a:ext cx="8229600" cy="4572000"/>
+          </a:xfrm>
+          <a:prstGeom prst="rect">
+            <a:avLst/>
+          </a:prstGeom>
+          <a:noFill/>
+        </p:spPr>
+        <p:txBody>
+          <a:bodyPr wrap="none">
+            <a:spAutoFit/>
+          </a:bodyPr>
+          <a:lstStyle/>
+          <a:p/>
+        </p:txBody>
+      </p:sp>
+    </p:spTree>
+  </p:cSld>
+  <p:clrMapOvr>
+    <a:masterClrMapping/>
+  </p:clrMapOvr>
+</p:sld>
+</file>
+
+<file path=ppt/slides/slide9.xml><?xml version="1.0" encoding="utf-8"?>
+<p:sld xmlns:a="http://schemas.openxmlformats.org/drawingml/2006/main" xmlns:p="http://schemas.openxmlformats.org/presentationml/2006/main" xmlns:r="http://schemas.openxmlformats.org/officeDocument/2006/relationships">
+  <p:cSld>
+    <p:spTree>
+      <p:nvGrpSpPr>
+        <p:cNvPr id="1" name=""/>
+        <p:cNvGrpSpPr/>
+        <p:nvPr/>
+      </p:nvGrpSpPr>
+      <p:grpSpPr/>
+      <p:sp>
+        <p:nvSpPr>
+          <p:cNvPr id="2" name="Title 1"/>
+          <p:cNvSpPr>
+            <a:spLocks noGrp="1"/>
+          </p:cNvSpPr>
+          <p:nvPr>
+            <p:ph type="title"/>
+          </p:nvPr>
+        </p:nvSpPr>
+        <p:spPr/>
+        <p:txBody>
+          <a:bodyPr/>
+          <a:lstStyle/>
+          <a:p/>
         </p:txBody>
       </p:sp>
       <p:graphicFrame>
         <p:nvGraphicFramePr>
-          <p:cNvPr id="6" name="Content Placeholder 5"/>
+          <p:cNvPr id="3" name="Table 2"/>
           <p:cNvGraphicFramePr>
             <a:graphicFrameLocks noGrp="1"/>
           </p:cNvGraphicFramePr>
-          <p:nvPr>
-            <p:ph idx="1"/>
-          </p:nvPr>
+          <p:nvPr/>
         </p:nvGraphicFramePr>
         <p:xfrm>
-          <a:off x="3568700" y="203200"/>
-          <a:ext cx="5105400" cy="4381500"/>
+          <a:off x="457200" y="914400"/>
+          <a:ext cx="8229600" cy="4572000"/>
         </p:xfrm>
         <a:graphic>
           <a:graphicData uri="http://schemas.openxmlformats.org/drawingml/2006/table">
@@ -3372,21 +4686,17 @@
                 <a:tableStyleId>{5C22544A-7EE6-4342-B048-85BDC9FD1C3A}</a:tableStyleId>
               </a:tblPr>
               <a:tblGrid>
-                <a:gridCol w="1701800"/>
-                <a:gridCol w="1701800"/>
-                <a:gridCol w="1701800"/>
+                <a:gridCol w="2743200"/>
+                <a:gridCol w="2743200"/>
+                <a:gridCol w="2743200"/>
               </a:tblGrid>
-              <a:tr h="0">
+              <a:tr h="1143000">
                 <a:tc>
                   <a:txBody>
                     <a:bodyPr/>
                     <a:lstStyle/>
                     <a:p>
-                      <a:pPr lvl="0" indent="0" marL="0" algn="l">
-                        <a:buNone/>
-                      </a:pPr>
                       <a:r>
-                        <a:rPr/>
                         <a:t>役割</a:t>
                       </a:r>
                     </a:p>
@@ -3398,11 +4708,7 @@
                     <a:bodyPr/>
                     <a:lstStyle/>
                     <a:p>
-                      <a:pPr lvl="0" indent="0" marL="0" algn="l">
-                        <a:buNone/>
-                      </a:pPr>
                       <a:r>
-                        <a:rPr/>
                         <a:t>担当者</a:t>
                       </a:r>
                     </a:p>
@@ -3414,11 +4720,7 @@
                     <a:bodyPr/>
                     <a:lstStyle/>
                     <a:p>
-                      <a:pPr lvl="0" indent="0" marL="0" algn="l">
-                        <a:buNone/>
-                      </a:pPr>
                       <a:r>
-                        <a:rPr/>
                         <a:t>責任範囲</a:t>
                       </a:r>
                     </a:p>
@@ -3426,145 +4728,118 @@
                   <a:tcPr/>
                 </a:tc>
               </a:tr>
-              <a:tr h="0">
+              <a:tr h="1143000">
                 <a:tc>
                   <a:txBody>
                     <a:bodyPr/>
                     <a:lstStyle/>
                     <a:p>
-                      <a:pPr lvl="0" indent="0" marL="0" algn="l">
-                        <a:buNone/>
-                      </a:pPr>
                       <a:r>
-                        <a:rPr/>
                         <a:t>プロジェクトマネージャー</a:t>
                       </a:r>
                     </a:p>
                   </a:txBody>
+                  <a:tcPr/>
                 </a:tc>
                 <a:tc>
                   <a:txBody>
                     <a:bodyPr/>
                     <a:lstStyle/>
                     <a:p>
-                      <a:pPr lvl="0" indent="0" marL="0" algn="l">
-                        <a:buNone/>
-                      </a:pPr>
                       <a:r>
-                        <a:rPr/>
                         <a:t>[PM名]</a:t>
                       </a:r>
                     </a:p>
                   </a:txBody>
+                  <a:tcPr/>
                 </a:tc>
                 <a:tc>
                   <a:txBody>
                     <a:bodyPr/>
                     <a:lstStyle/>
                     <a:p>
-                      <a:pPr lvl="0" indent="0" marL="0" algn="l">
-                        <a:buNone/>
-                      </a:pPr>
                       <a:r>
-                        <a:rPr/>
                         <a:t>全体管理、進捗、課題管理</a:t>
                       </a:r>
                     </a:p>
                   </a:txBody>
+                  <a:tcPr/>
                 </a:tc>
               </a:tr>
-              <a:tr h="0">
+              <a:tr h="1143000">
                 <a:tc>
                   <a:txBody>
                     <a:bodyPr/>
                     <a:lstStyle/>
                     <a:p>
-                      <a:pPr lvl="0" indent="0" marL="0" algn="l">
-                        <a:buNone/>
-                      </a:pPr>
                       <a:r>
-                        <a:rPr/>
                         <a:t>テックリード</a:t>
                       </a:r>
                     </a:p>
                   </a:txBody>
+                  <a:tcPr/>
                 </a:tc>
                 <a:tc>
                   <a:txBody>
                     <a:bodyPr/>
                     <a:lstStyle/>
                     <a:p>
-                      <a:pPr lvl="0" indent="0" marL="0" algn="l">
-                        <a:buNone/>
-                      </a:pPr>
                       <a:r>
-                        <a:rPr/>
                         <a:t>[リード名]</a:t>
                       </a:r>
                     </a:p>
                   </a:txBody>
+                  <a:tcPr/>
                 </a:tc>
                 <a:tc>
                   <a:txBody>
                     <a:bodyPr/>
                     <a:lstStyle/>
                     <a:p>
-                      <a:pPr lvl="0" indent="0" marL="0" algn="l">
-                        <a:buNone/>
-                      </a:pPr>
                       <a:r>
-                        <a:rPr/>
                         <a:t>技術選定、設計、コードレビュー</a:t>
                       </a:r>
                     </a:p>
                   </a:txBody>
+                  <a:tcPr/>
                 </a:tc>
               </a:tr>
-              <a:tr h="0">
+              <a:tr h="1143000">
                 <a:tc>
                   <a:txBody>
                     <a:bodyPr/>
                     <a:lstStyle/>
                     <a:p>
-                      <a:pPr lvl="0" indent="0" marL="0" algn="l">
-                        <a:buNone/>
-                      </a:pPr>
                       <a:r>
-                        <a:rPr/>
                         <a:t>開発担当</a:t>
                       </a:r>
                     </a:p>
                   </a:txBody>
+                  <a:tcPr/>
                 </a:tc>
                 <a:tc>
                   <a:txBody>
                     <a:bodyPr/>
                     <a:lstStyle/>
                     <a:p>
-                      <a:pPr lvl="0" indent="0" marL="0" algn="l">
-                        <a:buNone/>
-                      </a:pPr>
                       <a:r>
-                        <a:rPr/>
                         <a:t>[開発者名]</a:t>
                       </a:r>
                     </a:p>
                   </a:txBody>
+                  <a:tcPr/>
                 </a:tc>
                 <a:tc>
                   <a:txBody>
                     <a:bodyPr/>
                     <a:lstStyle/>
                     <a:p>
-                      <a:pPr lvl="0" indent="0" marL="0" algn="l">
-                        <a:buNone/>
-                      </a:pPr>
                       <a:r>
-                        <a:rPr/>
                         <a:t>機能実装、テスト</a:t>
                       </a:r>
                     </a:p>
                   </a:txBody>
+                  <a:tcPr/>
                 </a:tc>
               </a:tr>
             </a:tbl>
@@ -3573,634 +4848,9 @@
       </p:graphicFrame>
     </p:spTree>
   </p:cSld>
-</p:sld>
-</file>
-
-<file path=ppt/slides/slide4.xml><?xml version="1.0" encoding="utf-8"?>
-<p:sld xmlns:a="http://schemas.openxmlformats.org/drawingml/2006/main" xmlns:r="http://schemas.openxmlformats.org/officeDocument/2006/relationships" xmlns:p="http://schemas.openxmlformats.org/presentationml/2006/main">
-  <p:cSld>
-    <p:spTree>
-      <p:nvGrpSpPr>
-        <p:cNvPr id="1" name=""/>
-        <p:cNvGrpSpPr/>
-        <p:nvPr/>
-      </p:nvGrpSpPr>
-      <p:grpSpPr>
-        <a:xfrm>
-          <a:off x="0" y="0"/>
-          <a:ext cx="0" cy="0"/>
-          <a:chOff x="0" y="0"/>
-          <a:chExt cx="0" cy="0"/>
-        </a:xfrm>
-      </p:grpSpPr>
-      <p:sp>
-        <p:nvSpPr>
-          <p:cNvPr id="3" name="Content Placeholder 2"/>
-          <p:cNvSpPr>
-            <a:spLocks noGrp="1"/>
-          </p:cNvSpPr>
-          <p:nvPr>
-            <p:ph idx="1"/>
-          </p:nvPr>
-        </p:nvSpPr>
-        <p:spPr/>
-        <p:txBody>
-          <a:bodyPr/>
-          <a:lstStyle/>
-          <a:p>
-            <a:pPr lvl="0" indent="0" marL="0">
-              <a:buNone/>
-            </a:pPr>
-          </a:p>
-          <a:p>
-            <a:pPr lvl="0" indent="0" marL="0">
-              <a:spcBef>
-                <a:spcPts val="3000"/>
-              </a:spcBef>
-              <a:buNone/>
-            </a:pPr>
-            <a:r>
-              <a:rPr b="1"/>
-              <a:t>見出し3</a:t>
-            </a:r>
-          </a:p>
-          <a:p>
-            <a:pPr lvl="0" indent="0" marL="0">
-              <a:spcBef>
-                <a:spcPts val="3000"/>
-              </a:spcBef>
-              <a:buNone/>
-            </a:pPr>
-            <a:r>
-              <a:rPr b="1"/>
-              <a:t>見出し4</a:t>
-            </a:r>
-          </a:p>
-          <a:p>
-            <a:pPr lvl="0"/>
-            <a:r>
-              <a:rPr b="1"/>
-              <a:t>定例会議:</a:t>
-            </a:r>
-            <a:r>
-              <a:rPr/>
-              <a:t> 毎週月曜日 10:00-10:30</a:t>
-            </a:r>
-          </a:p>
-          <a:p>
-            <a:pPr lvl="1"/>
-            <a:r>
-              <a:rPr b="1"/>
-              <a:t>連絡ツール:</a:t>
-            </a:r>
-            <a:r>
-              <a:rPr/>
-              <a:t> Slack, Google Meet</a:t>
-            </a:r>
-          </a:p>
-          <a:p>
-            <a:pPr lvl="2"/>
-            <a:r>
-              <a:rPr/>
-              <a:t>その他</a:t>
-            </a:r>
-          </a:p>
-        </p:txBody>
-      </p:sp>
-    </p:spTree>
-  </p:cSld>
-</p:sld>
-</file>
-
-<file path=ppt/slides/slide5.xml><?xml version="1.0" encoding="utf-8"?>
-<p:sld xmlns:a="http://schemas.openxmlformats.org/drawingml/2006/main" xmlns:r="http://schemas.openxmlformats.org/officeDocument/2006/relationships" xmlns:p="http://schemas.openxmlformats.org/presentationml/2006/main">
-  <p:cSld>
-    <p:spTree>
-      <p:nvGrpSpPr>
-        <p:cNvPr id="1" name=""/>
-        <p:cNvGrpSpPr/>
-        <p:nvPr/>
-      </p:nvGrpSpPr>
-      <p:grpSpPr>
-        <a:xfrm>
-          <a:off x="0" y="0"/>
-          <a:ext cx="0" cy="0"/>
-          <a:chOff x="0" y="0"/>
-          <a:chExt cx="0" cy="0"/>
-        </a:xfrm>
-      </p:grpSpPr>
-      <p:sp>
-        <p:nvSpPr>
-          <p:cNvPr id="2" name="Title 1"/>
-          <p:cNvSpPr>
-            <a:spLocks noGrp="1"/>
-          </p:cNvSpPr>
-          <p:nvPr>
-            <p:ph type="title"/>
-          </p:nvPr>
-        </p:nvSpPr>
-        <p:spPr/>
-        <p:txBody>
-          <a:bodyPr/>
-          <a:lstStyle/>
-          <a:p>
-            <a:pPr lvl="0" indent="0" marL="0">
-              <a:buNone/>
-            </a:pPr>
-            <a:r>
-              <a:rPr/>
-              <a:t>Design Guideline</a:t>
-            </a:r>
-          </a:p>
-        </p:txBody>
-      </p:sp>
-      <p:sp>
-        <p:nvSpPr>
-          <p:cNvPr id="3" name="Content Placeholder 2"/>
-          <p:cNvSpPr>
-            <a:spLocks noGrp="1"/>
-          </p:cNvSpPr>
-          <p:nvPr>
-            <p:ph idx="1"/>
-          </p:nvPr>
-        </p:nvSpPr>
-        <p:spPr/>
-        <p:txBody>
-          <a:bodyPr/>
-          <a:lstStyle/>
-          <a:p>
-            <a:pPr lvl="0" indent="0" marL="0">
-              <a:spcBef>
-                <a:spcPts val="3000"/>
-              </a:spcBef>
-              <a:buNone/>
-            </a:pPr>
-            <a:r>
-              <a:rPr b="1"/>
-              <a:t>このテンプレートを美しく保つためのルール</a:t>
-            </a:r>
-          </a:p>
-        </p:txBody>
-      </p:sp>
-    </p:spTree>
-  </p:cSld>
-</p:sld>
-</file>
-
-<file path=ppt/slides/slide6.xml><?xml version="1.0" encoding="utf-8"?>
-<p:sld xmlns:a="http://schemas.openxmlformats.org/drawingml/2006/main" xmlns:r="http://schemas.openxmlformats.org/officeDocument/2006/relationships" xmlns:p="http://schemas.openxmlformats.org/presentationml/2006/main">
-  <p:cSld>
-    <p:spTree>
-      <p:nvGrpSpPr>
-        <p:cNvPr id="1" name=""/>
-        <p:cNvGrpSpPr/>
-        <p:nvPr/>
-      </p:nvGrpSpPr>
-      <p:grpSpPr>
-        <a:xfrm>
-          <a:off x="0" y="0"/>
-          <a:ext cx="0" cy="0"/>
-          <a:chOff x="0" y="0"/>
-          <a:chExt cx="0" cy="0"/>
-        </a:xfrm>
-      </p:grpSpPr>
-      <p:sp>
-        <p:nvSpPr>
-          <p:cNvPr id="3" name="Content Placeholder 2"/>
-          <p:cNvSpPr>
-            <a:spLocks noGrp="1"/>
-          </p:cNvSpPr>
-          <p:nvPr>
-            <p:ph idx="1"/>
-          </p:nvPr>
-        </p:nvSpPr>
-        <p:spPr/>
-        <p:txBody>
-          <a:bodyPr/>
-          <a:lstStyle/>
-          <a:p>
-            <a:pPr lvl="0" indent="0" marL="0">
-              <a:spcBef>
-                <a:spcPts val="3000"/>
-              </a:spcBef>
-              <a:buNone/>
-            </a:pPr>
-            <a:r>
-              <a:rPr b="1"/>
-              <a:t>スライドタイトル (</a:t>
-            </a:r>
-            <a:r>
-              <a:rPr b="1">
-                <a:latin typeface="Courier"/>
-              </a:rPr>
-              <a:t>##</a:t>
-            </a:r>
-            <a:r>
-              <a:rPr b="1"/>
-              <a:t>) のルール</a:t>
-            </a:r>
-          </a:p>
-          <a:p>
-            <a:pPr lvl="0" indent="0" marL="0">
-              <a:spcBef>
-                <a:spcPts val="3000"/>
-              </a:spcBef>
-              <a:buNone/>
-            </a:pPr>
-            <a:r>
-              <a:rPr b="1"/>
-              <a:t>原則: 必ず1行に収めること</a:t>
-            </a:r>
-          </a:p>
-          <a:p>
-            <a:pPr lvl="0" indent="0" marL="0">
-              <a:buNone/>
-            </a:pPr>
-            <a:r>
-              <a:rPr/>
-              <a:t>タイトルが2行になると、後続のコンテンツと重なり、レイアウトが完全に崩れてしまいます。これは最も重要なルールです。</a:t>
-            </a:r>
-          </a:p>
-          <a:p>
-            <a:pPr lvl="0" indent="0" marL="0">
-              <a:spcBef>
-                <a:spcPts val="3000"/>
-              </a:spcBef>
-              <a:buNone/>
-            </a:pPr>
-            <a:r>
-              <a:rPr b="1"/>
-              <a:t>目安: 全角30文字以内</a:t>
-            </a:r>
-          </a:p>
-          <a:p>
-            <a:pPr lvl="0" indent="0" marL="0">
-              <a:buNone/>
-            </a:pPr>
-            <a:r>
-              <a:rPr/>
-              <a:t>簡潔で分かりやすいタイトルを心がけてください。</a:t>
-            </a:r>
-          </a:p>
-          <a:p>
-            <a:pPr lvl="0" indent="0" marL="0">
-              <a:buNone/>
-            </a:pPr>
-          </a:p>
-          <a:p>
-            <a:pPr lvl="0" indent="0" marL="0">
-              <a:spcBef>
-                <a:spcPts val="3000"/>
-              </a:spcBef>
-              <a:buNone/>
-            </a:pPr>
-            <a:r>
-              <a:rPr b="1"/>
-              <a:t>悪い例 (Bad) </a:t>
-            </a:r>
-          </a:p>
-          <a:p>
-            <a:pPr lvl="0" indent="0" marL="0">
-              <a:buNone/>
-            </a:pPr>
-            <a:r>
-              <a:rPr>
-                <a:latin typeface="Courier"/>
-              </a:rPr>
-              <a:t>## このプロジェクトにおける非常に重要な技術的負債とその具体的な返済計画に関する長大な考察</a:t>
-            </a:r>
-            <a:r>
-              <a:rPr/>
-              <a:t> （長すぎて改行され、レイアウトが崩れます）</a:t>
-            </a:r>
-          </a:p>
-        </p:txBody>
-      </p:sp>
-    </p:spTree>
-  </p:cSld>
-</p:sld>
-</file>
-
-<file path=ppt/slides/slide7.xml><?xml version="1.0" encoding="utf-8"?>
-<p:sld xmlns:a="http://schemas.openxmlformats.org/drawingml/2006/main" xmlns:r="http://schemas.openxmlformats.org/officeDocument/2006/relationships" xmlns:p="http://schemas.openxmlformats.org/presentationml/2006/main">
-  <p:cSld>
-    <p:spTree>
-      <p:nvGrpSpPr>
-        <p:cNvPr id="1" name=""/>
-        <p:cNvGrpSpPr/>
-        <p:nvPr/>
-      </p:nvGrpSpPr>
-      <p:grpSpPr>
-        <a:xfrm>
-          <a:off x="0" y="0"/>
-          <a:ext cx="0" cy="0"/>
-          <a:chOff x="0" y="0"/>
-          <a:chExt cx="0" cy="0"/>
-        </a:xfrm>
-      </p:grpSpPr>
-      <p:sp>
-        <p:nvSpPr>
-          <p:cNvPr id="3" name="Content Placeholder 2"/>
-          <p:cNvSpPr>
-            <a:spLocks noGrp="1"/>
-          </p:cNvSpPr>
-          <p:nvPr>
-            <p:ph idx="1"/>
-          </p:nvPr>
-        </p:nvSpPr>
-        <p:spPr/>
-        <p:txBody>
-          <a:bodyPr/>
-          <a:lstStyle/>
-          <a:p>
-            <a:pPr lvl="0" indent="0" marL="0">
-              <a:spcBef>
-                <a:spcPts val="3000"/>
-              </a:spcBef>
-              <a:buNone/>
-            </a:pPr>
-            <a:r>
-              <a:rPr b="1"/>
-              <a:t>本文・箇条書きのルール</a:t>
-            </a:r>
-          </a:p>
-          <a:p>
-            <a:pPr lvl="0" indent="0" marL="0">
-              <a:spcBef>
-                <a:spcPts val="3000"/>
-              </a:spcBef>
-              <a:buNone/>
-            </a:pPr>
-            <a:r>
-              <a:rPr b="1"/>
-              <a:t>原則: 1スライド・1メッセージ</a:t>
-            </a:r>
-          </a:p>
-          <a:p>
-            <a:pPr lvl="0" indent="0" marL="0">
-              <a:buNone/>
-            </a:pPr>
-            <a:r>
-              <a:rPr/>
-              <a:t>1枚のスライドに情報を詰め込みすぎず、聞き手が集中できるよう、最も伝えたいメッセージを1つに絞りましょう。</a:t>
-            </a:r>
-          </a:p>
-          <a:p>
-            <a:pPr lvl="0" indent="0" marL="0">
-              <a:spcBef>
-                <a:spcPts val="3000"/>
-              </a:spcBef>
-              <a:buNone/>
-            </a:pPr>
-            <a:r>
-              <a:rPr b="1"/>
-              <a:t>推奨するレイアウトと文字量</a:t>
-            </a:r>
-          </a:p>
-          <a:p>
-            <a:pPr lvl="0"/>
-            <a:r>
-              <a:rPr b="1"/>
-              <a:t>1行あたりの文字数:</a:t>
-            </a:r>
-            <a:r>
-              <a:rPr/>
-              <a:t> </a:t>
-            </a:r>
-            <a:r>
-              <a:rPr b="1"/>
-              <a:t>全角35〜45文字</a:t>
-            </a:r>
-          </a:p>
-          <a:p>
-            <a:pPr lvl="1"/>
-            <a:r>
-              <a:rPr/>
-              <a:t>これを超えると視線の移動が大きくなり、読みにくくなります。適度な位置で改行を入れましょう。</a:t>
-            </a:r>
-          </a:p>
-          <a:p>
-            <a:pPr lvl="0"/>
-            <a:r>
-              <a:rPr b="1"/>
-              <a:t>箇条書きの項目数:</a:t>
-            </a:r>
-            <a:r>
-              <a:rPr/>
-              <a:t> </a:t>
-            </a:r>
-            <a:r>
-              <a:rPr b="1"/>
-              <a:t>5〜7個</a:t>
-            </a:r>
-            <a:r>
-              <a:rPr/>
-              <a:t>まで</a:t>
-            </a:r>
-          </a:p>
-          <a:p>
-            <a:pPr lvl="0"/>
-            <a:r>
-              <a:rPr b="1"/>
-              <a:t>各項目の行数:</a:t>
-            </a:r>
-            <a:r>
-              <a:rPr/>
-              <a:t> </a:t>
-            </a:r>
-            <a:r>
-              <a:rPr b="1"/>
-              <a:t>1〜2行</a:t>
-            </a:r>
-            <a:r>
-              <a:rPr/>
-              <a:t>が理想</a:t>
-            </a:r>
-          </a:p>
-          <a:p>
-            <a:pPr lvl="0"/>
-            <a:r>
-              <a:rPr b="1"/>
-              <a:t>文章（パラグラフ）の行数:</a:t>
-            </a:r>
-            <a:r>
-              <a:rPr/>
-              <a:t> </a:t>
-            </a:r>
-            <a:r>
-              <a:rPr b="1"/>
-              <a:t>5〜7行</a:t>
-            </a:r>
-            <a:r>
-              <a:rPr/>
-              <a:t>程度まで</a:t>
-            </a:r>
-          </a:p>
-          <a:p>
-            <a:pPr lvl="0" indent="0" marL="0">
-              <a:buNone/>
-            </a:pPr>
-            <a:r>
-              <a:rPr/>
-              <a:t>スライドはドキュメントではありません。詳細は口頭で補うか、別途資料を配布しましょう。</a:t>
-            </a:r>
-          </a:p>
-        </p:txBody>
-      </p:sp>
-    </p:spTree>
-  </p:cSld>
-</p:sld>
-</file>
-
-<file path=ppt/slides/slide8.xml><?xml version="1.0" encoding="utf-8"?>
-<p:sld xmlns:a="http://schemas.openxmlformats.org/drawingml/2006/main" xmlns:r="http://schemas.openxmlformats.org/officeDocument/2006/relationships" xmlns:p="http://schemas.openxmlformats.org/presentationml/2006/main">
-  <p:cSld>
-    <p:spTree>
-      <p:nvGrpSpPr>
-        <p:cNvPr id="1" name=""/>
-        <p:cNvGrpSpPr/>
-        <p:nvPr/>
-      </p:nvGrpSpPr>
-      <p:grpSpPr>
-        <a:xfrm>
-          <a:off x="0" y="0"/>
-          <a:ext cx="0" cy="0"/>
-          <a:chOff x="0" y="0"/>
-          <a:chExt cx="0" cy="0"/>
-        </a:xfrm>
-      </p:grpSpPr>
-      <p:sp>
-        <p:nvSpPr>
-          <p:cNvPr id="3" name="Content Placeholder 2"/>
-          <p:cNvSpPr>
-            <a:spLocks noGrp="1"/>
-          </p:cNvSpPr>
-          <p:nvPr>
-            <p:ph idx="1"/>
-          </p:nvPr>
-        </p:nvSpPr>
-        <p:spPr/>
-        <p:txBody>
-          <a:bodyPr/>
-          <a:lstStyle/>
-          <a:p>
-            <a:pPr lvl="0" indent="0" marL="0">
-              <a:spcBef>
-                <a:spcPts val="3000"/>
-              </a:spcBef>
-              <a:buNone/>
-            </a:pPr>
-            <a:r>
-              <a:rPr b="1"/>
-              <a:t>その他の要素のルール</a:t>
-            </a:r>
-          </a:p>
-          <a:p>
-            <a:pPr lvl="0" indent="0" marL="0">
-              <a:spcBef>
-                <a:spcPts val="3000"/>
-              </a:spcBef>
-              <a:buNone/>
-            </a:pPr>
-            <a:r>
-              <a:rPr b="1"/>
-              <a:t>見出し3 (</a:t>
-            </a:r>
-            <a:r>
-              <a:rPr b="1">
-                <a:latin typeface="Courier"/>
-              </a:rPr>
-              <a:t>###</a:t>
-            </a:r>
-            <a:r>
-              <a:rPr b="1"/>
-              <a:t>)</a:t>
-            </a:r>
-          </a:p>
-          <a:p>
-            <a:pPr lvl="0" indent="0" marL="0">
-              <a:buNone/>
-            </a:pPr>
-            <a:r>
-              <a:rPr/>
-              <a:t>サブタイトルや小見出しとして使用します。 - </a:t>
-            </a:r>
-            <a:r>
-              <a:rPr b="1"/>
-              <a:t>目安:</a:t>
-            </a:r>
-            <a:r>
-              <a:rPr/>
-              <a:t> 全角15文字以内 - </a:t>
-            </a:r>
-            <a:r>
-              <a:rPr b="1"/>
-              <a:t>役割:</a:t>
-            </a:r>
-            <a:r>
-              <a:rPr/>
-              <a:t> これから話す内容を簡潔に示します。</a:t>
-            </a:r>
-          </a:p>
-          <a:p>
-            <a:pPr lvl="0" indent="0" marL="0">
-              <a:spcBef>
-                <a:spcPts val="3000"/>
-              </a:spcBef>
-              <a:buNone/>
-            </a:pPr>
-            <a:r>
-              <a:rPr b="1"/>
-              <a:t>テーブル (</a:t>
-            </a:r>
-            <a:r>
-              <a:rPr b="1">
-                <a:latin typeface="Courier"/>
-              </a:rPr>
-              <a:t>| |</a:t>
-            </a:r>
-            <a:r>
-              <a:rPr b="1"/>
-              <a:t>)</a:t>
-            </a:r>
-          </a:p>
-          <a:p>
-            <a:pPr lvl="0" indent="0" marL="0">
-              <a:buNone/>
-            </a:pPr>
-            <a:r>
-              <a:rPr/>
-              <a:t>情報を整理して見せる際に有効ですが、複雑になりすぎないように注意が必要です。 - </a:t>
-            </a:r>
-            <a:r>
-              <a:rPr b="1"/>
-              <a:t>推奨カラム（列）数:</a:t>
-            </a:r>
-            <a:r>
-              <a:rPr/>
-              <a:t> </a:t>
-            </a:r>
-            <a:r>
-              <a:rPr b="1"/>
-              <a:t>3〜4列</a:t>
-            </a:r>
-            <a:r>
-              <a:rPr/>
-              <a:t>まで - </a:t>
-            </a:r>
-            <a:r>
-              <a:rPr b="1"/>
-              <a:t>セル内のテキスト:</a:t>
-            </a:r>
-            <a:r>
-              <a:rPr/>
-              <a:t> 可能な限り簡潔に。長いテキストは箇条書きにするなど、表現を工夫しましょう。</a:t>
-            </a:r>
-          </a:p>
-        </p:txBody>
-      </p:sp>
-    </p:spTree>
-  </p:cSld>
+  <p:clrMapOvr>
+    <a:masterClrMapping/>
+  </p:clrMapOvr>
 </p:sld>
 </file>
 
@@ -4522,265 +5172,4 @@
   </a:objectDefaults>
   <a:extraClrSchemeLst/>
 </a:theme>
-</file>
-
-<file path=ppt/theme/theme2.xml><?xml version="1.0" encoding="utf-8"?>
-<a:theme xmlns:a="http://schemas.openxmlformats.org/drawingml/2006/main" name="Office Theme">
-  <a:themeElements>
-    <a:clrScheme name="Office">
-      <a:dk1>
-        <a:sysClr val="windowText" lastClr="000000"/>
-      </a:dk1>
-      <a:lt1>
-        <a:sysClr val="window" lastClr="FFFFFF"/>
-      </a:lt1>
-      <a:dk2>
-        <a:srgbClr val="44546A"/>
-      </a:dk2>
-      <a:lt2>
-        <a:srgbClr val="E7E6E6"/>
-      </a:lt2>
-      <a:accent1>
-        <a:srgbClr val="5B9BD5"/>
-      </a:accent1>
-      <a:accent2>
-        <a:srgbClr val="ED7D31"/>
-      </a:accent2>
-      <a:accent3>
-        <a:srgbClr val="A5A5A5"/>
-      </a:accent3>
-      <a:accent4>
-        <a:srgbClr val="FFC000"/>
-      </a:accent4>
-      <a:accent5>
-        <a:srgbClr val="4472C4"/>
-      </a:accent5>
-      <a:accent6>
-        <a:srgbClr val="70AD47"/>
-      </a:accent6>
-      <a:hlink>
-        <a:srgbClr val="0563C1"/>
-      </a:hlink>
-      <a:folHlink>
-        <a:srgbClr val="954F72"/>
-      </a:folHlink>
-    </a:clrScheme>
-    <a:fontScheme name="Office">
-      <a:majorFont>
-        <a:latin typeface="Calibri Light" panose="020F0302020204030204"/>
-        <a:ea typeface=""/>
-        <a:cs typeface=""/>
-        <a:font script="Jpan" typeface="ＭＳ Ｐゴシック"/>
-        <a:font script="Hang" typeface="맑은 고딕"/>
-        <a:font script="Hans" typeface="宋体"/>
-        <a:font script="Hant" typeface="新細明體"/>
-        <a:font script="Arab" typeface="Times New Roman"/>
-        <a:font script="Hebr" typeface="Times New Roman"/>
-        <a:font script="Thai" typeface="Angsana New"/>
-        <a:font script="Ethi" typeface="Nyala"/>
-        <a:font script="Beng" typeface="Vrinda"/>
-        <a:font script="Gujr" typeface="Shruti"/>
-        <a:font script="Khmr" typeface="MoolBoran"/>
-        <a:font script="Knda" typeface="Tunga"/>
-        <a:font script="Guru" typeface="Raavi"/>
-        <a:font script="Cans" typeface="Euphemia"/>
-        <a:font script="Cher" typeface="Plantagenet Cherokee"/>
-        <a:font script="Yiii" typeface="Microsoft Yi Baiti"/>
-        <a:font script="Tibt" typeface="Microsoft Himalaya"/>
-        <a:font script="Thaa" typeface="MV Boli"/>
-        <a:font script="Deva" typeface="Mangal"/>
-        <a:font script="Telu" typeface="Gautami"/>
-        <a:font script="Taml" typeface="Latha"/>
-        <a:font script="Syrc" typeface="Estrangelo Edessa"/>
-        <a:font script="Orya" typeface="Kalinga"/>
-        <a:font script="Mlym" typeface="Kartika"/>
-        <a:font script="Laoo" typeface="DokChampa"/>
-        <a:font script="Sinh" typeface="Iskoola Pota"/>
-        <a:font script="Mong" typeface="Mongolian Baiti"/>
-        <a:font script="Viet" typeface="Times New Roman"/>
-        <a:font script="Uigh" typeface="Microsoft Uighur"/>
-        <a:font script="Geor" typeface="Sylfaen"/>
-      </a:majorFont>
-      <a:minorFont>
-        <a:latin typeface="Calibri" panose="020F0502020204030204"/>
-        <a:ea typeface=""/>
-        <a:cs typeface=""/>
-        <a:font script="Jpan" typeface="ＭＳ Ｐゴシック"/>
-        <a:font script="Hang" typeface="맑은 고딕"/>
-        <a:font script="Hans" typeface="宋体"/>
-        <a:font script="Hant" typeface="新細明體"/>
-        <a:font script="Arab" typeface="Arial"/>
-        <a:font script="Hebr" typeface="Arial"/>
-        <a:font script="Thai" typeface="Cordia New"/>
-        <a:font script="Ethi" typeface="Nyala"/>
-        <a:font script="Beng" typeface="Vrinda"/>
-        <a:font script="Gujr" typeface="Shruti"/>
-        <a:font script="Khmr" typeface="DaunPenh"/>
-        <a:font script="Knda" typeface="Tunga"/>
-        <a:font script="Guru" typeface="Raavi"/>
-        <a:font script="Cans" typeface="Euphemia"/>
-        <a:font script="Cher" typeface="Plantagenet Cherokee"/>
-        <a:font script="Yiii" typeface="Microsoft Yi Baiti"/>
-        <a:font script="Tibt" typeface="Microsoft Himalaya"/>
-        <a:font script="Thaa" typeface="MV Boli"/>
-        <a:font script="Deva" typeface="Mangal"/>
-        <a:font script="Telu" typeface="Gautami"/>
-        <a:font script="Taml" typeface="Latha"/>
-        <a:font script="Syrc" typeface="Estrangelo Edessa"/>
-        <a:font script="Orya" typeface="Kalinga"/>
-        <a:font script="Mlym" typeface="Kartika"/>
-        <a:font script="Laoo" typeface="DokChampa"/>
-        <a:font script="Sinh" typeface="Iskoola Pota"/>
-        <a:font script="Mong" typeface="Mongolian Baiti"/>
-        <a:font script="Viet" typeface="Arial"/>
-        <a:font script="Uigh" typeface="Microsoft Uighur"/>
-        <a:font script="Geor" typeface="Sylfaen"/>
-      </a:minorFont>
-    </a:fontScheme>
-    <a:fmtScheme name="Office">
-      <a:fillStyleLst>
-        <a:solidFill>
-          <a:schemeClr val="phClr"/>
-        </a:solidFill>
-        <a:gradFill rotWithShape="1">
-          <a:gsLst>
-            <a:gs pos="0">
-              <a:schemeClr val="phClr">
-                <a:lumMod val="110000"/>
-                <a:satMod val="105000"/>
-                <a:tint val="67000"/>
-              </a:schemeClr>
-            </a:gs>
-            <a:gs pos="50000">
-              <a:schemeClr val="phClr">
-                <a:lumMod val="105000"/>
-                <a:satMod val="103000"/>
-                <a:tint val="73000"/>
-              </a:schemeClr>
-            </a:gs>
-            <a:gs pos="100000">
-              <a:schemeClr val="phClr">
-                <a:lumMod val="105000"/>
-                <a:satMod val="109000"/>
-                <a:tint val="81000"/>
-              </a:schemeClr>
-            </a:gs>
-          </a:gsLst>
-          <a:lin ang="5400000" scaled="0"/>
-        </a:gradFill>
-        <a:gradFill rotWithShape="1">
-          <a:gsLst>
-            <a:gs pos="0">
-              <a:schemeClr val="phClr">
-                <a:satMod val="103000"/>
-                <a:lumMod val="102000"/>
-                <a:tint val="94000"/>
-              </a:schemeClr>
-            </a:gs>
-            <a:gs pos="50000">
-              <a:schemeClr val="phClr">
-                <a:satMod val="110000"/>
-                <a:lumMod val="100000"/>
-                <a:shade val="100000"/>
-              </a:schemeClr>
-            </a:gs>
-            <a:gs pos="100000">
-              <a:schemeClr val="phClr">
-                <a:lumMod val="99000"/>
-                <a:satMod val="120000"/>
-                <a:shade val="78000"/>
-              </a:schemeClr>
-            </a:gs>
-          </a:gsLst>
-          <a:lin ang="5400000" scaled="0"/>
-        </a:gradFill>
-      </a:fillStyleLst>
-      <a:lnStyleLst>
-        <a:ln w="6350" cap="flat" cmpd="sng" algn="ctr">
-          <a:solidFill>
-            <a:schemeClr val="phClr"/>
-          </a:solidFill>
-          <a:prstDash val="solid"/>
-          <a:miter lim="800000"/>
-        </a:ln>
-        <a:ln w="12700" cap="flat" cmpd="sng" algn="ctr">
-          <a:solidFill>
-            <a:schemeClr val="phClr"/>
-          </a:solidFill>
-          <a:prstDash val="solid"/>
-          <a:miter lim="800000"/>
-        </a:ln>
-        <a:ln w="19050" cap="flat" cmpd="sng" algn="ctr">
-          <a:solidFill>
-            <a:schemeClr val="phClr"/>
-          </a:solidFill>
-          <a:prstDash val="solid"/>
-          <a:miter lim="800000"/>
-        </a:ln>
-      </a:lnStyleLst>
-      <a:effectStyleLst>
-        <a:effectStyle>
-          <a:effectLst/>
-        </a:effectStyle>
-        <a:effectStyle>
-          <a:effectLst/>
-        </a:effectStyle>
-        <a:effectStyle>
-          <a:effectLst>
-            <a:outerShdw blurRad="57150" dist="19050" dir="5400000" algn="ctr" rotWithShape="0">
-              <a:srgbClr val="000000">
-                <a:alpha val="63000"/>
-              </a:srgbClr>
-            </a:outerShdw>
-          </a:effectLst>
-        </a:effectStyle>
-      </a:effectStyleLst>
-      <a:bgFillStyleLst>
-        <a:solidFill>
-          <a:schemeClr val="phClr"/>
-        </a:solidFill>
-        <a:solidFill>
-          <a:schemeClr val="phClr">
-            <a:tint val="95000"/>
-            <a:satMod val="170000"/>
-          </a:schemeClr>
-        </a:solidFill>
-        <a:gradFill rotWithShape="1">
-          <a:gsLst>
-            <a:gs pos="0">
-              <a:schemeClr val="phClr">
-                <a:tint val="93000"/>
-                <a:satMod val="150000"/>
-                <a:shade val="98000"/>
-                <a:lumMod val="102000"/>
-              </a:schemeClr>
-            </a:gs>
-            <a:gs pos="50000">
-              <a:schemeClr val="phClr">
-                <a:tint val="98000"/>
-                <a:satMod val="130000"/>
-                <a:shade val="90000"/>
-                <a:lumMod val="103000"/>
-              </a:schemeClr>
-            </a:gs>
-            <a:gs pos="100000">
-              <a:schemeClr val="phClr">
-                <a:shade val="63000"/>
-                <a:satMod val="120000"/>
-              </a:schemeClr>
-            </a:gs>
-          </a:gsLst>
-          <a:lin ang="5400000" scaled="0"/>
-        </a:gradFill>
-      </a:bgFillStyleLst>
-    </a:fmtScheme>
-  </a:themeElements>
-  <a:objectDefaults/>
-  <a:extraClrSchemeLst/>
-  <a:extLst>
-    <a:ext uri="{05A4C25C-085E-4340-85A3-A5531E510DB2}">
-      <thm15:themeFamily xmlns:thm15="http://schemas.microsoft.com/office/thememl/2012/main" name="Office Theme" id="{62F939B6-93AF-4DB8-9C6B-D6C7DFDC589F}" vid="{4A3C46E8-61CC-4603-A589-7422A47A8E4A}"/>
-    </a:ext>
-  </a:extLst>
-</a:theme>
 </file>
--- a/Comp/OutPPTX/marp.pptx
+++ b/Comp/OutPPTX/marp.pptx
@@ -309,7 +309,7 @@
           <a:p>
             <a:fld id="{241EB5C9-1307-BA42-ABA2-0BC069CD8E7F}" type="datetimeFigureOut">
               <a:rPr lang="en-US" smtClean="0"/>
-              <a:t>1/2/22</a:t>
+              <a:t>3/12/2026</a:t>
             </a:fld>
             <a:endParaRPr lang="en-US"/>
           </a:p>
@@ -477,7 +477,7 @@
           <a:p>
             <a:fld id="{241EB5C9-1307-BA42-ABA2-0BC069CD8E7F}" type="datetimeFigureOut">
               <a:rPr lang="en-US" smtClean="0"/>
-              <a:t>1/2/22</a:t>
+              <a:t>3/12/2026</a:t>
             </a:fld>
             <a:endParaRPr lang="en-US"/>
           </a:p>
@@ -655,7 +655,7 @@
           <a:p>
             <a:fld id="{241EB5C9-1307-BA42-ABA2-0BC069CD8E7F}" type="datetimeFigureOut">
               <a:rPr lang="en-US" smtClean="0"/>
-              <a:t>1/2/22</a:t>
+              <a:t>3/12/2026</a:t>
             </a:fld>
             <a:endParaRPr lang="en-US"/>
           </a:p>
@@ -746,10 +746,18 @@
         <p:spPr/>
         <p:txBody>
           <a:bodyPr/>
-          <a:lstStyle/>
-          <a:p>
-            <a:r>
-              <a:rPr lang="en-US"/>
+          <a:lstStyle>
+            <a:lvl1pPr>
+              <a:defRPr>
+                <a:solidFill>
+                  <a:schemeClr val="accent1"/>
+                </a:solidFill>
+              </a:defRPr>
+            </a:lvl1pPr>
+          </a:lstStyle>
+          <a:p>
+            <a:r>
+              <a:rPr lang="en-US" dirty="0"/>
               <a:t>Click to edit Master title style</a:t>
             </a:r>
           </a:p>
@@ -823,7 +831,7 @@
           <a:p>
             <a:fld id="{241EB5C9-1307-BA42-ABA2-0BC069CD8E7F}" type="datetimeFigureOut">
               <a:rPr lang="en-US" smtClean="0"/>
-              <a:t>1/2/22</a:t>
+              <a:t>3/12/2026</a:t>
             </a:fld>
             <a:endParaRPr lang="en-US"/>
           </a:p>
@@ -1068,7 +1076,7 @@
           <a:p>
             <a:fld id="{241EB5C9-1307-BA42-ABA2-0BC069CD8E7F}" type="datetimeFigureOut">
               <a:rPr lang="en-US" smtClean="0"/>
-              <a:t>1/2/22</a:t>
+              <a:t>3/12/2026</a:t>
             </a:fld>
             <a:endParaRPr lang="en-US"/>
           </a:p>
@@ -1353,7 +1361,7 @@
           <a:p>
             <a:fld id="{241EB5C9-1307-BA42-ABA2-0BC069CD8E7F}" type="datetimeFigureOut">
               <a:rPr lang="en-US" smtClean="0"/>
-              <a:t>1/2/22</a:t>
+              <a:t>3/12/2026</a:t>
             </a:fld>
             <a:endParaRPr lang="en-US"/>
           </a:p>
@@ -1772,7 +1780,7 @@
           <a:p>
             <a:fld id="{241EB5C9-1307-BA42-ABA2-0BC069CD8E7F}" type="datetimeFigureOut">
               <a:rPr lang="en-US" smtClean="0"/>
-              <a:t>1/2/22</a:t>
+              <a:t>3/12/2026</a:t>
             </a:fld>
             <a:endParaRPr lang="en-US"/>
           </a:p>
@@ -1889,7 +1897,7 @@
           <a:p>
             <a:fld id="{241EB5C9-1307-BA42-ABA2-0BC069CD8E7F}" type="datetimeFigureOut">
               <a:rPr lang="en-US" smtClean="0"/>
-              <a:t>1/2/22</a:t>
+              <a:t>3/12/2026</a:t>
             </a:fld>
             <a:endParaRPr lang="en-US"/>
           </a:p>
@@ -1984,7 +1992,7 @@
           <a:p>
             <a:fld id="{241EB5C9-1307-BA42-ABA2-0BC069CD8E7F}" type="datetimeFigureOut">
               <a:rPr lang="en-US" smtClean="0"/>
-              <a:t>1/2/22</a:t>
+              <a:t>3/12/2026</a:t>
             </a:fld>
             <a:endParaRPr lang="en-US"/>
           </a:p>
@@ -2259,7 +2267,7 @@
           <a:p>
             <a:fld id="{241EB5C9-1307-BA42-ABA2-0BC069CD8E7F}" type="datetimeFigureOut">
               <a:rPr lang="en-US" smtClean="0"/>
-              <a:t>1/2/22</a:t>
+              <a:t>3/12/2026</a:t>
             </a:fld>
             <a:endParaRPr lang="en-US"/>
           </a:p>
@@ -2511,7 +2519,7 @@
           <a:p>
             <a:fld id="{241EB5C9-1307-BA42-ABA2-0BC069CD8E7F}" type="datetimeFigureOut">
               <a:rPr lang="en-US" smtClean="0"/>
-              <a:t>1/2/22</a:t>
+              <a:t>3/12/2026</a:t>
             </a:fld>
             <a:endParaRPr lang="en-US"/>
           </a:p>
@@ -2722,7 +2730,7 @@
           <a:p>
             <a:fld id="{241EB5C9-1307-BA42-ABA2-0BC069CD8E7F}" type="datetimeFigureOut">
               <a:rPr lang="en-US" smtClean="0"/>
-              <a:t>1/2/22</a:t>
+              <a:t>3/12/2026</a:t>
             </a:fld>
             <a:endParaRPr lang="en-US"/>
           </a:p>
